--- a/ESTIMA_VRD_Presentation_Commerciale.pptx
+++ b/ESTIMA_VRD_Presentation_Commerciale.pptx
@@ -23,6 +23,8 @@
     <p:sldId id="271" r:id="rId17"/>
     <p:sldId id="272" r:id="rId18"/>
     <p:sldId id="273" r:id="rId19"/>
+    <p:sldId id="275" r:id="rId26"/>
+    <p:sldId id="276" r:id="rId27"/>
     <p:sldId id="274" r:id="rId20"/>
   </p:sldIdLst>
   <p:notesMasterIdLst>
@@ -2496,6 +2498,10 @@
           </a:solidFill>
           <a:ln/>
         </p:spPr>
+        <p:txBody>
+          <a:bodyPr/>
+          <a:p/>
+        </p:txBody>
       </p:sp>
       <p:sp>
         <p:nvSpPr>
@@ -2516,6 +2522,10 @@
           </a:solidFill>
           <a:ln/>
         </p:spPr>
+        <p:txBody>
+          <a:bodyPr/>
+          <a:p/>
+        </p:txBody>
       </p:sp>
       <p:sp>
         <p:nvSpPr>
@@ -2575,6 +2585,10 @@
           </a:solidFill>
           <a:ln/>
         </p:spPr>
+        <p:txBody>
+          <a:bodyPr/>
+          <a:p/>
+        </p:txBody>
       </p:sp>
       <p:sp>
         <p:nvSpPr>
@@ -2659,6 +2673,10 @@
           </a:solidFill>
           <a:ln/>
         </p:spPr>
+        <p:txBody>
+          <a:bodyPr/>
+          <a:p/>
+        </p:txBody>
       </p:sp>
       <p:sp>
         <p:nvSpPr>
@@ -2732,7 +2750,7 @@
                 <a:ea typeface="Calibri" pitchFamily="34" charset="-122"/>
                 <a:cs typeface="Calibri" pitchFamily="34" charset="-120"/>
               </a:rPr>
-              <a:t>1 / 19</a:t>
+              <a:t>1 / 21</a:t>
             </a:r>
             <a:endParaRPr lang="en-US" sz="900" dirty="0"/>
           </a:p>
@@ -2789,6 +2807,10 @@
           </a:solidFill>
           <a:ln/>
         </p:spPr>
+        <p:txBody>
+          <a:bodyPr/>
+          <a:p/>
+        </p:txBody>
       </p:sp>
       <p:sp>
         <p:nvSpPr>
@@ -2848,6 +2870,10 @@
           </a:solidFill>
           <a:ln/>
         </p:spPr>
+        <p:txBody>
+          <a:bodyPr/>
+          <a:p/>
+        </p:txBody>
       </p:sp>
       <p:sp>
         <p:nvSpPr>
@@ -2907,6 +2933,10 @@
           </a:solidFill>
           <a:ln/>
         </p:spPr>
+        <p:txBody>
+          <a:bodyPr/>
+          <a:p/>
+        </p:txBody>
       </p:sp>
       <p:sp>
         <p:nvSpPr>
@@ -2966,6 +2996,10 @@
           </a:solidFill>
           <a:ln/>
         </p:spPr>
+        <p:txBody>
+          <a:bodyPr/>
+          <a:p/>
+        </p:txBody>
       </p:sp>
       <p:sp>
         <p:nvSpPr>
@@ -3025,6 +3059,10 @@
           </a:solidFill>
           <a:ln/>
         </p:spPr>
+        <p:txBody>
+          <a:bodyPr/>
+          <a:p/>
+        </p:txBody>
       </p:sp>
       <p:sp>
         <p:nvSpPr>
@@ -3084,6 +3122,10 @@
           </a:solidFill>
           <a:ln/>
         </p:spPr>
+        <p:txBody>
+          <a:bodyPr/>
+          <a:p/>
+        </p:txBody>
       </p:sp>
       <p:sp>
         <p:nvSpPr>
@@ -3143,6 +3185,10 @@
           </a:solidFill>
           <a:ln/>
         </p:spPr>
+        <p:txBody>
+          <a:bodyPr/>
+          <a:p/>
+        </p:txBody>
       </p:sp>
       <p:sp>
         <p:nvSpPr>
@@ -3216,7 +3262,7 @@
                 <a:ea typeface="Calibri" pitchFamily="34" charset="-122"/>
                 <a:cs typeface="Calibri" pitchFamily="34" charset="-120"/>
               </a:rPr>
-              <a:t>10 / 19</a:t>
+              <a:t>10 / 21</a:t>
             </a:r>
             <a:endParaRPr lang="en-US" sz="900" dirty="0"/>
           </a:p>
@@ -3273,6 +3319,10 @@
           </a:solidFill>
           <a:ln/>
         </p:spPr>
+        <p:txBody>
+          <a:bodyPr/>
+          <a:p/>
+        </p:txBody>
       </p:sp>
       <p:sp>
         <p:nvSpPr>
@@ -3332,6 +3382,10 @@
           </a:solidFill>
           <a:ln/>
         </p:spPr>
+        <p:txBody>
+          <a:bodyPr/>
+          <a:p/>
+        </p:txBody>
       </p:sp>
       <p:sp>
         <p:nvSpPr>
@@ -3391,6 +3445,10 @@
           </a:solidFill>
           <a:ln/>
         </p:spPr>
+        <p:txBody>
+          <a:bodyPr/>
+          <a:p/>
+        </p:txBody>
       </p:sp>
       <p:sp>
         <p:nvSpPr>
@@ -3450,6 +3508,10 @@
           </a:solidFill>
           <a:ln/>
         </p:spPr>
+        <p:txBody>
+          <a:bodyPr/>
+          <a:p/>
+        </p:txBody>
       </p:sp>
       <p:sp>
         <p:nvSpPr>
@@ -3509,6 +3571,10 @@
           </a:solidFill>
           <a:ln/>
         </p:spPr>
+        <p:txBody>
+          <a:bodyPr/>
+          <a:p/>
+        </p:txBody>
       </p:sp>
       <p:sp>
         <p:nvSpPr>
@@ -3568,6 +3634,10 @@
           </a:solidFill>
           <a:ln/>
         </p:spPr>
+        <p:txBody>
+          <a:bodyPr/>
+          <a:p/>
+        </p:txBody>
       </p:sp>
       <p:sp>
         <p:nvSpPr>
@@ -3627,6 +3697,10 @@
           </a:solidFill>
           <a:ln/>
         </p:spPr>
+        <p:txBody>
+          <a:bodyPr/>
+          <a:p/>
+        </p:txBody>
       </p:sp>
       <p:sp>
         <p:nvSpPr>
@@ -3686,6 +3760,10 @@
           </a:solidFill>
           <a:ln/>
         </p:spPr>
+        <p:txBody>
+          <a:bodyPr/>
+          <a:p/>
+        </p:txBody>
       </p:sp>
       <p:sp>
         <p:nvSpPr>
@@ -3759,7 +3837,7 @@
                 <a:ea typeface="Calibri" pitchFamily="34" charset="-122"/>
                 <a:cs typeface="Calibri" pitchFamily="34" charset="-120"/>
               </a:rPr>
-              <a:t>11 / 19</a:t>
+              <a:t>11 / 21</a:t>
             </a:r>
             <a:endParaRPr lang="en-US" sz="900" dirty="0"/>
           </a:p>
@@ -3816,6 +3894,10 @@
           </a:solidFill>
           <a:ln/>
         </p:spPr>
+        <p:txBody>
+          <a:bodyPr/>
+          <a:p/>
+        </p:txBody>
       </p:sp>
       <p:sp>
         <p:nvSpPr>
@@ -3875,6 +3957,10 @@
           </a:solidFill>
           <a:ln/>
         </p:spPr>
+        <p:txBody>
+          <a:bodyPr/>
+          <a:p/>
+        </p:txBody>
       </p:sp>
       <p:sp>
         <p:nvSpPr>
@@ -3934,6 +4020,10 @@
           </a:solidFill>
           <a:ln/>
         </p:spPr>
+        <p:txBody>
+          <a:bodyPr/>
+          <a:p/>
+        </p:txBody>
       </p:sp>
       <p:sp>
         <p:nvSpPr>
@@ -3993,6 +4083,10 @@
           </a:solidFill>
           <a:ln/>
         </p:spPr>
+        <p:txBody>
+          <a:bodyPr/>
+          <a:p/>
+        </p:txBody>
       </p:sp>
       <p:sp>
         <p:nvSpPr>
@@ -4052,6 +4146,10 @@
           </a:solidFill>
           <a:ln/>
         </p:spPr>
+        <p:txBody>
+          <a:bodyPr/>
+          <a:p/>
+        </p:txBody>
       </p:sp>
       <p:sp>
         <p:nvSpPr>
@@ -4111,6 +4209,10 @@
           </a:solidFill>
           <a:ln/>
         </p:spPr>
+        <p:txBody>
+          <a:bodyPr/>
+          <a:p/>
+        </p:txBody>
       </p:sp>
       <p:sp>
         <p:nvSpPr>
@@ -4170,6 +4272,10 @@
           </a:solidFill>
           <a:ln/>
         </p:spPr>
+        <p:txBody>
+          <a:bodyPr/>
+          <a:p/>
+        </p:txBody>
       </p:sp>
       <p:sp>
         <p:nvSpPr>
@@ -4243,7 +4349,7 @@
                 <a:ea typeface="Calibri" pitchFamily="34" charset="-122"/>
                 <a:cs typeface="Calibri" pitchFamily="34" charset="-120"/>
               </a:rPr>
-              <a:t>12 / 19</a:t>
+              <a:t>12 / 21</a:t>
             </a:r>
             <a:endParaRPr lang="en-US" sz="900" dirty="0"/>
           </a:p>
@@ -4300,6 +4406,10 @@
           </a:solidFill>
           <a:ln/>
         </p:spPr>
+        <p:txBody>
+          <a:bodyPr/>
+          <a:p/>
+        </p:txBody>
       </p:sp>
       <p:sp>
         <p:nvSpPr>
@@ -4359,6 +4469,10 @@
           </a:solidFill>
           <a:ln/>
         </p:spPr>
+        <p:txBody>
+          <a:bodyPr/>
+          <a:p/>
+        </p:txBody>
       </p:sp>
       <p:sp>
         <p:nvSpPr>
@@ -4418,6 +4532,10 @@
           </a:solidFill>
           <a:ln/>
         </p:spPr>
+        <p:txBody>
+          <a:bodyPr/>
+          <a:p/>
+        </p:txBody>
       </p:sp>
       <p:sp>
         <p:nvSpPr>
@@ -4477,6 +4595,10 @@
           </a:solidFill>
           <a:ln/>
         </p:spPr>
+        <p:txBody>
+          <a:bodyPr/>
+          <a:p/>
+        </p:txBody>
       </p:sp>
       <p:sp>
         <p:nvSpPr>
@@ -4536,6 +4658,10 @@
           </a:solidFill>
           <a:ln/>
         </p:spPr>
+        <p:txBody>
+          <a:bodyPr/>
+          <a:p/>
+        </p:txBody>
       </p:sp>
       <p:sp>
         <p:nvSpPr>
@@ -4595,6 +4721,10 @@
           </a:solidFill>
           <a:ln/>
         </p:spPr>
+        <p:txBody>
+          <a:bodyPr/>
+          <a:p/>
+        </p:txBody>
       </p:sp>
       <p:sp>
         <p:nvSpPr>
@@ -4654,6 +4784,10 @@
           </a:solidFill>
           <a:ln/>
         </p:spPr>
+        <p:txBody>
+          <a:bodyPr/>
+          <a:p/>
+        </p:txBody>
       </p:sp>
       <p:sp>
         <p:nvSpPr>
@@ -4713,6 +4847,10 @@
           </a:solidFill>
           <a:ln/>
         </p:spPr>
+        <p:txBody>
+          <a:bodyPr/>
+          <a:p/>
+        </p:txBody>
       </p:sp>
       <p:sp>
         <p:nvSpPr>
@@ -4786,7 +4924,7 @@
                 <a:ea typeface="Calibri" pitchFamily="34" charset="-122"/>
                 <a:cs typeface="Calibri" pitchFamily="34" charset="-120"/>
               </a:rPr>
-              <a:t>13 / 19</a:t>
+              <a:t>13 / 21</a:t>
             </a:r>
             <a:endParaRPr lang="en-US" sz="900" dirty="0"/>
           </a:p>
@@ -4843,6 +4981,10 @@
           </a:solidFill>
           <a:ln/>
         </p:spPr>
+        <p:txBody>
+          <a:bodyPr/>
+          <a:p/>
+        </p:txBody>
       </p:sp>
       <p:sp>
         <p:nvSpPr>
@@ -4902,6 +5044,10 @@
           </a:solidFill>
           <a:ln/>
         </p:spPr>
+        <p:txBody>
+          <a:bodyPr/>
+          <a:p/>
+        </p:txBody>
       </p:sp>
       <p:sp>
         <p:nvSpPr>
@@ -4973,6 +5119,10 @@
             </a:outerShdw>
           </a:effectLst>
         </p:spPr>
+        <p:txBody>
+          <a:bodyPr/>
+          <a:p/>
+        </p:txBody>
       </p:sp>
       <p:sp>
         <p:nvSpPr>
@@ -4993,6 +5143,10 @@
           </a:solidFill>
           <a:ln/>
         </p:spPr>
+        <p:txBody>
+          <a:bodyPr/>
+          <a:p/>
+        </p:txBody>
       </p:sp>
       <p:sp>
         <p:nvSpPr>
@@ -5103,6 +5257,10 @@
             </a:outerShdw>
           </a:effectLst>
         </p:spPr>
+        <p:txBody>
+          <a:bodyPr/>
+          <a:p/>
+        </p:txBody>
       </p:sp>
       <p:sp>
         <p:nvSpPr>
@@ -5123,6 +5281,10 @@
           </a:solidFill>
           <a:ln/>
         </p:spPr>
+        <p:txBody>
+          <a:bodyPr/>
+          <a:p/>
+        </p:txBody>
       </p:sp>
       <p:sp>
         <p:nvSpPr>
@@ -5233,6 +5395,10 @@
             </a:outerShdw>
           </a:effectLst>
         </p:spPr>
+        <p:txBody>
+          <a:bodyPr/>
+          <a:p/>
+        </p:txBody>
       </p:sp>
       <p:sp>
         <p:nvSpPr>
@@ -5253,6 +5419,10 @@
           </a:solidFill>
           <a:ln/>
         </p:spPr>
+        <p:txBody>
+          <a:bodyPr/>
+          <a:p/>
+        </p:txBody>
       </p:sp>
       <p:sp>
         <p:nvSpPr>
@@ -5363,6 +5533,10 @@
             </a:outerShdw>
           </a:effectLst>
         </p:spPr>
+        <p:txBody>
+          <a:bodyPr/>
+          <a:p/>
+        </p:txBody>
       </p:sp>
       <p:sp>
         <p:nvSpPr>
@@ -5383,6 +5557,10 @@
           </a:solidFill>
           <a:ln/>
         </p:spPr>
+        <p:txBody>
+          <a:bodyPr/>
+          <a:p/>
+        </p:txBody>
       </p:sp>
       <p:sp>
         <p:nvSpPr>
@@ -5483,6 +5661,10 @@
           </a:solidFill>
           <a:ln/>
         </p:spPr>
+        <p:txBody>
+          <a:bodyPr/>
+          <a:p/>
+        </p:txBody>
       </p:sp>
       <p:sp>
         <p:nvSpPr>
@@ -5556,7 +5738,7 @@
                 <a:ea typeface="Calibri" pitchFamily="34" charset="-122"/>
                 <a:cs typeface="Calibri" pitchFamily="34" charset="-120"/>
               </a:rPr>
-              <a:t>14 / 19</a:t>
+              <a:t>14 / 21</a:t>
             </a:r>
             <a:endParaRPr lang="en-US" sz="900" dirty="0"/>
           </a:p>
@@ -5613,6 +5795,10 @@
           </a:solidFill>
           <a:ln/>
         </p:spPr>
+        <p:txBody>
+          <a:bodyPr/>
+          <a:p/>
+        </p:txBody>
       </p:sp>
       <p:sp>
         <p:nvSpPr>
@@ -5672,6 +5858,10 @@
           </a:solidFill>
           <a:ln/>
         </p:spPr>
+        <p:txBody>
+          <a:bodyPr/>
+          <a:p/>
+        </p:txBody>
       </p:sp>
       <p:sp>
         <p:nvSpPr>
@@ -5731,6 +5921,10 @@
           </a:solidFill>
           <a:ln/>
         </p:spPr>
+        <p:txBody>
+          <a:bodyPr/>
+          <a:p/>
+        </p:txBody>
       </p:sp>
       <p:sp>
         <p:nvSpPr>
@@ -5790,6 +5984,10 @@
           </a:solidFill>
           <a:ln/>
         </p:spPr>
+        <p:txBody>
+          <a:bodyPr/>
+          <a:p/>
+        </p:txBody>
       </p:sp>
       <p:sp>
         <p:nvSpPr>
@@ -5849,6 +6047,10 @@
           </a:solidFill>
           <a:ln/>
         </p:spPr>
+        <p:txBody>
+          <a:bodyPr/>
+          <a:p/>
+        </p:txBody>
       </p:sp>
       <p:sp>
         <p:nvSpPr>
@@ -5908,6 +6110,10 @@
           </a:solidFill>
           <a:ln/>
         </p:spPr>
+        <p:txBody>
+          <a:bodyPr/>
+          <a:p/>
+        </p:txBody>
       </p:sp>
       <p:sp>
         <p:nvSpPr>
@@ -5967,6 +6173,10 @@
           </a:solidFill>
           <a:ln/>
         </p:spPr>
+        <p:txBody>
+          <a:bodyPr/>
+          <a:p/>
+        </p:txBody>
       </p:sp>
       <p:sp>
         <p:nvSpPr>
@@ -6026,6 +6236,10 @@
           </a:solidFill>
           <a:ln/>
         </p:spPr>
+        <p:txBody>
+          <a:bodyPr/>
+          <a:p/>
+        </p:txBody>
       </p:sp>
       <p:sp>
         <p:nvSpPr>
@@ -6099,7 +6313,7 @@
                 <a:ea typeface="Calibri" pitchFamily="34" charset="-122"/>
                 <a:cs typeface="Calibri" pitchFamily="34" charset="-120"/>
               </a:rPr>
-              <a:t>15 / 19</a:t>
+              <a:t>15 / 21</a:t>
             </a:r>
             <a:endParaRPr lang="en-US" sz="900" dirty="0"/>
           </a:p>
@@ -6156,6 +6370,10 @@
           </a:solidFill>
           <a:ln/>
         </p:spPr>
+        <p:txBody>
+          <a:bodyPr/>
+          <a:p/>
+        </p:txBody>
       </p:sp>
       <p:sp>
         <p:nvSpPr>
@@ -6215,6 +6433,10 @@
           </a:solidFill>
           <a:ln/>
         </p:spPr>
+        <p:txBody>
+          <a:bodyPr/>
+          <a:p/>
+        </p:txBody>
       </p:sp>
       <p:sp>
         <p:nvSpPr>
@@ -6286,6 +6508,10 @@
             </a:outerShdw>
           </a:effectLst>
         </p:spPr>
+        <p:txBody>
+          <a:bodyPr/>
+          <a:p/>
+        </p:txBody>
       </p:sp>
       <p:sp>
         <p:nvSpPr>
@@ -6306,6 +6532,10 @@
           </a:solidFill>
           <a:ln/>
         </p:spPr>
+        <p:txBody>
+          <a:bodyPr/>
+          <a:p/>
+        </p:txBody>
       </p:sp>
       <p:sp>
         <p:nvSpPr>
@@ -6377,6 +6607,10 @@
             </a:outerShdw>
           </a:effectLst>
         </p:spPr>
+        <p:txBody>
+          <a:bodyPr/>
+          <a:p/>
+        </p:txBody>
       </p:sp>
       <p:sp>
         <p:nvSpPr>
@@ -6397,6 +6631,10 @@
           </a:solidFill>
           <a:ln/>
         </p:spPr>
+        <p:txBody>
+          <a:bodyPr/>
+          <a:p/>
+        </p:txBody>
       </p:sp>
       <p:sp>
         <p:nvSpPr>
@@ -6468,6 +6706,10 @@
             </a:outerShdw>
           </a:effectLst>
         </p:spPr>
+        <p:txBody>
+          <a:bodyPr/>
+          <a:p/>
+        </p:txBody>
       </p:sp>
       <p:sp>
         <p:nvSpPr>
@@ -6488,6 +6730,10 @@
           </a:solidFill>
           <a:ln/>
         </p:spPr>
+        <p:txBody>
+          <a:bodyPr/>
+          <a:p/>
+        </p:txBody>
       </p:sp>
       <p:sp>
         <p:nvSpPr>
@@ -6559,6 +6805,10 @@
             </a:outerShdw>
           </a:effectLst>
         </p:spPr>
+        <p:txBody>
+          <a:bodyPr/>
+          <a:p/>
+        </p:txBody>
       </p:sp>
       <p:sp>
         <p:nvSpPr>
@@ -6579,6 +6829,10 @@
           </a:solidFill>
           <a:ln/>
         </p:spPr>
+        <p:txBody>
+          <a:bodyPr/>
+          <a:p/>
+        </p:txBody>
       </p:sp>
       <p:sp>
         <p:nvSpPr>
@@ -6650,6 +6904,10 @@
             </a:outerShdw>
           </a:effectLst>
         </p:spPr>
+        <p:txBody>
+          <a:bodyPr/>
+          <a:p/>
+        </p:txBody>
       </p:sp>
       <p:sp>
         <p:nvSpPr>
@@ -6670,6 +6928,10 @@
           </a:solidFill>
           <a:ln/>
         </p:spPr>
+        <p:txBody>
+          <a:bodyPr/>
+          <a:p/>
+        </p:txBody>
       </p:sp>
       <p:sp>
         <p:nvSpPr>
@@ -6743,7 +7005,7 @@
                 <a:ea typeface="Calibri" pitchFamily="34" charset="-122"/>
                 <a:cs typeface="Calibri" pitchFamily="34" charset="-120"/>
               </a:rPr>
-              <a:t>16 / 19</a:t>
+              <a:t>16 / 21</a:t>
             </a:r>
             <a:endParaRPr lang="en-US" sz="900" dirty="0"/>
           </a:p>
@@ -6839,6 +7101,10 @@
           </a:solidFill>
           <a:ln/>
         </p:spPr>
+        <p:txBody>
+          <a:bodyPr/>
+          <a:p/>
+        </p:txBody>
       </p:sp>
       <p:sp>
         <p:nvSpPr>
@@ -6910,6 +7176,10 @@
             </a:outerShdw>
           </a:effectLst>
         </p:spPr>
+        <p:txBody>
+          <a:bodyPr/>
+          <a:p/>
+        </p:txBody>
       </p:sp>
       <p:sp>
         <p:nvSpPr>
@@ -6930,6 +7200,10 @@
           </a:solidFill>
           <a:ln/>
         </p:spPr>
+        <p:txBody>
+          <a:bodyPr/>
+          <a:p/>
+        </p:txBody>
       </p:sp>
       <p:sp>
         <p:nvSpPr>
@@ -7057,6 +7331,10 @@
             </a:outerShdw>
           </a:effectLst>
         </p:spPr>
+        <p:txBody>
+          <a:bodyPr/>
+          <a:p/>
+        </p:txBody>
       </p:sp>
       <p:sp>
         <p:nvSpPr>
@@ -7077,6 +7355,10 @@
           </a:solidFill>
           <a:ln/>
         </p:spPr>
+        <p:txBody>
+          <a:bodyPr/>
+          <a:p/>
+        </p:txBody>
       </p:sp>
       <p:sp>
         <p:nvSpPr>
@@ -7204,6 +7486,10 @@
             </a:outerShdw>
           </a:effectLst>
         </p:spPr>
+        <p:txBody>
+          <a:bodyPr/>
+          <a:p/>
+        </p:txBody>
       </p:sp>
       <p:sp>
         <p:nvSpPr>
@@ -7224,6 +7510,10 @@
           </a:solidFill>
           <a:ln/>
         </p:spPr>
+        <p:txBody>
+          <a:bodyPr/>
+          <a:p/>
+        </p:txBody>
       </p:sp>
       <p:sp>
         <p:nvSpPr>
@@ -7351,6 +7641,10 @@
             </a:outerShdw>
           </a:effectLst>
         </p:spPr>
+        <p:txBody>
+          <a:bodyPr/>
+          <a:p/>
+        </p:txBody>
       </p:sp>
       <p:sp>
         <p:nvSpPr>
@@ -7371,6 +7665,10 @@
           </a:solidFill>
           <a:ln/>
         </p:spPr>
+        <p:txBody>
+          <a:bodyPr/>
+          <a:p/>
+        </p:txBody>
       </p:sp>
       <p:sp>
         <p:nvSpPr>
@@ -7498,6 +7796,10 @@
             </a:outerShdw>
           </a:effectLst>
         </p:spPr>
+        <p:txBody>
+          <a:bodyPr/>
+          <a:p/>
+        </p:txBody>
       </p:sp>
       <p:sp>
         <p:nvSpPr>
@@ -7518,6 +7820,10 @@
           </a:solidFill>
           <a:ln/>
         </p:spPr>
+        <p:txBody>
+          <a:bodyPr/>
+          <a:p/>
+        </p:txBody>
       </p:sp>
       <p:sp>
         <p:nvSpPr>
@@ -7645,6 +7951,10 @@
             </a:outerShdw>
           </a:effectLst>
         </p:spPr>
+        <p:txBody>
+          <a:bodyPr/>
+          <a:p/>
+        </p:txBody>
       </p:sp>
       <p:sp>
         <p:nvSpPr>
@@ -7665,6 +7975,10 @@
           </a:solidFill>
           <a:ln/>
         </p:spPr>
+        <p:txBody>
+          <a:bodyPr/>
+          <a:p/>
+        </p:txBody>
       </p:sp>
       <p:sp>
         <p:nvSpPr>
@@ -7794,7 +8108,7 @@
                 <a:ea typeface="Calibri" pitchFamily="34" charset="-122"/>
                 <a:cs typeface="Calibri" pitchFamily="34" charset="-120"/>
               </a:rPr>
-              <a:t>17 / 19</a:t>
+              <a:t>17 / 21</a:t>
             </a:r>
             <a:endParaRPr lang="en-US" sz="900" dirty="0"/>
           </a:p>
@@ -7890,6 +8204,10 @@
           </a:solidFill>
           <a:ln/>
         </p:spPr>
+        <p:txBody>
+          <a:bodyPr/>
+          <a:p/>
+        </p:txBody>
       </p:sp>
       <p:sp>
         <p:nvSpPr>
@@ -7949,6 +8267,10 @@
           </a:solidFill>
           <a:ln/>
         </p:spPr>
+        <p:txBody>
+          <a:bodyPr/>
+          <a:p/>
+        </p:txBody>
       </p:sp>
       <p:sp>
         <p:nvSpPr>
@@ -8047,6 +8369,10 @@
           </a:solidFill>
           <a:ln/>
         </p:spPr>
+        <p:txBody>
+          <a:bodyPr/>
+          <a:p/>
+        </p:txBody>
       </p:sp>
       <p:sp>
         <p:nvSpPr>
@@ -8111,6 +8437,10 @@
             <a:prstDash val="solid"/>
           </a:ln>
         </p:spPr>
+        <p:txBody>
+          <a:bodyPr/>
+          <a:p/>
+        </p:txBody>
       </p:sp>
       <p:sp>
         <p:nvSpPr>
@@ -8170,6 +8500,10 @@
           </a:solidFill>
           <a:ln/>
         </p:spPr>
+        <p:txBody>
+          <a:bodyPr/>
+          <a:p/>
+        </p:txBody>
       </p:sp>
       <p:sp>
         <p:nvSpPr>
@@ -8195,6 +8529,10 @@
             <a:prstDash val="solid"/>
           </a:ln>
         </p:spPr>
+        <p:txBody>
+          <a:bodyPr/>
+          <a:p/>
+        </p:txBody>
       </p:sp>
       <p:sp>
         <p:nvSpPr>
@@ -8259,6 +8597,10 @@
             <a:prstDash val="solid"/>
           </a:ln>
         </p:spPr>
+        <p:txBody>
+          <a:bodyPr/>
+          <a:p/>
+        </p:txBody>
       </p:sp>
       <p:sp>
         <p:nvSpPr>
@@ -8318,6 +8660,10 @@
           </a:solidFill>
           <a:ln/>
         </p:spPr>
+        <p:txBody>
+          <a:bodyPr/>
+          <a:p/>
+        </p:txBody>
       </p:sp>
       <p:sp>
         <p:nvSpPr>
@@ -8343,6 +8689,10 @@
             <a:prstDash val="solid"/>
           </a:ln>
         </p:spPr>
+        <p:txBody>
+          <a:bodyPr/>
+          <a:p/>
+        </p:txBody>
       </p:sp>
       <p:sp>
         <p:nvSpPr>
@@ -8407,6 +8757,10 @@
             <a:prstDash val="solid"/>
           </a:ln>
         </p:spPr>
+        <p:txBody>
+          <a:bodyPr/>
+          <a:p/>
+        </p:txBody>
       </p:sp>
       <p:sp>
         <p:nvSpPr>
@@ -8466,6 +8820,10 @@
           </a:solidFill>
           <a:ln/>
         </p:spPr>
+        <p:txBody>
+          <a:bodyPr/>
+          <a:p/>
+        </p:txBody>
       </p:sp>
       <p:sp>
         <p:nvSpPr>
@@ -8491,6 +8849,10 @@
             <a:prstDash val="solid"/>
           </a:ln>
         </p:spPr>
+        <p:txBody>
+          <a:bodyPr/>
+          <a:p/>
+        </p:txBody>
       </p:sp>
       <p:sp>
         <p:nvSpPr>
@@ -8555,6 +8917,10 @@
             <a:prstDash val="solid"/>
           </a:ln>
         </p:spPr>
+        <p:txBody>
+          <a:bodyPr/>
+          <a:p/>
+        </p:txBody>
       </p:sp>
       <p:sp>
         <p:nvSpPr>
@@ -8614,6 +8980,10 @@
           </a:solidFill>
           <a:ln/>
         </p:spPr>
+        <p:txBody>
+          <a:bodyPr/>
+          <a:p/>
+        </p:txBody>
       </p:sp>
       <p:sp>
         <p:nvSpPr>
@@ -8639,6 +9009,10 @@
             <a:prstDash val="solid"/>
           </a:ln>
         </p:spPr>
+        <p:txBody>
+          <a:bodyPr/>
+          <a:p/>
+        </p:txBody>
       </p:sp>
       <p:sp>
         <p:nvSpPr>
@@ -8703,6 +9077,10 @@
             <a:prstDash val="solid"/>
           </a:ln>
         </p:spPr>
+        <p:txBody>
+          <a:bodyPr/>
+          <a:p/>
+        </p:txBody>
       </p:sp>
       <p:sp>
         <p:nvSpPr>
@@ -8762,6 +9140,10 @@
           </a:solidFill>
           <a:ln/>
         </p:spPr>
+        <p:txBody>
+          <a:bodyPr/>
+          <a:p/>
+        </p:txBody>
       </p:sp>
       <p:sp>
         <p:nvSpPr>
@@ -8787,6 +9169,10 @@
             <a:prstDash val="solid"/>
           </a:ln>
         </p:spPr>
+        <p:txBody>
+          <a:bodyPr/>
+          <a:p/>
+        </p:txBody>
       </p:sp>
       <p:sp>
         <p:nvSpPr>
@@ -8851,6 +9237,10 @@
             <a:prstDash val="solid"/>
           </a:ln>
         </p:spPr>
+        <p:txBody>
+          <a:bodyPr/>
+          <a:p/>
+        </p:txBody>
       </p:sp>
       <p:sp>
         <p:nvSpPr>
@@ -8910,6 +9300,10 @@
           </a:solidFill>
           <a:ln/>
         </p:spPr>
+        <p:txBody>
+          <a:bodyPr/>
+          <a:p/>
+        </p:txBody>
       </p:sp>
       <p:sp>
         <p:nvSpPr>
@@ -8935,6 +9329,10 @@
             <a:prstDash val="solid"/>
           </a:ln>
         </p:spPr>
+        <p:txBody>
+          <a:bodyPr/>
+          <a:p/>
+        </p:txBody>
       </p:sp>
       <p:sp>
         <p:nvSpPr>
@@ -9008,7 +9406,7 @@
                 <a:ea typeface="Calibri" pitchFamily="34" charset="-122"/>
                 <a:cs typeface="Calibri" pitchFamily="34" charset="-120"/>
               </a:rPr>
-              <a:t>18 / 19</a:t>
+              <a:t>18 / 21</a:t>
             </a:r>
             <a:endParaRPr lang="en-US" sz="900" dirty="0"/>
           </a:p>
@@ -9065,6 +9463,10 @@
           </a:solidFill>
           <a:ln/>
         </p:spPr>
+        <p:txBody>
+          <a:bodyPr/>
+          <a:p/>
+        </p:txBody>
       </p:sp>
       <p:sp>
         <p:nvSpPr>
@@ -9085,6 +9487,10 @@
           </a:solidFill>
           <a:ln/>
         </p:spPr>
+        <p:txBody>
+          <a:bodyPr/>
+          <a:p/>
+        </p:txBody>
       </p:sp>
       <p:sp>
         <p:nvSpPr>
@@ -9167,6 +9573,10 @@
           </a:solidFill>
           <a:ln/>
         </p:spPr>
+        <p:txBody>
+          <a:bodyPr/>
+          <a:p/>
+        </p:txBody>
       </p:sp>
       <p:sp>
         <p:nvSpPr>
@@ -9189,6 +9599,10 @@
           </a:solidFill>
           <a:ln/>
         </p:spPr>
+        <p:txBody>
+          <a:bodyPr/>
+          <a:p/>
+        </p:txBody>
       </p:sp>
       <p:sp>
         <p:nvSpPr>
@@ -9250,6 +9664,10 @@
           </a:solidFill>
           <a:ln/>
         </p:spPr>
+        <p:txBody>
+          <a:bodyPr/>
+          <a:p/>
+        </p:txBody>
       </p:sp>
       <p:sp>
         <p:nvSpPr>
@@ -9311,6 +9729,10 @@
           </a:solidFill>
           <a:ln/>
         </p:spPr>
+        <p:txBody>
+          <a:bodyPr/>
+          <a:p/>
+        </p:txBody>
       </p:sp>
       <p:sp>
         <p:nvSpPr>
@@ -9372,6 +9794,10 @@
           </a:solidFill>
           <a:ln/>
         </p:spPr>
+        <p:txBody>
+          <a:bodyPr/>
+          <a:p/>
+        </p:txBody>
       </p:sp>
       <p:sp>
         <p:nvSpPr>
@@ -9445,7 +9871,7 @@
                 <a:ea typeface="Calibri" pitchFamily="34" charset="-122"/>
                 <a:cs typeface="Calibri" pitchFamily="34" charset="-120"/>
               </a:rPr>
-              <a:t>19 / 19</a:t>
+              <a:t>21 / 21</a:t>
             </a:r>
             <a:endParaRPr lang="en-US" sz="900" dirty="0"/>
           </a:p>
@@ -9541,6 +9967,10 @@
           </a:solidFill>
           <a:ln/>
         </p:spPr>
+        <p:txBody>
+          <a:bodyPr/>
+          <a:p/>
+        </p:txBody>
       </p:sp>
       <p:sp>
         <p:nvSpPr>
@@ -9612,6 +10042,10 @@
             </a:outerShdw>
           </a:effectLst>
         </p:spPr>
+        <p:txBody>
+          <a:bodyPr/>
+          <a:p/>
+        </p:txBody>
       </p:sp>
       <p:sp>
         <p:nvSpPr>
@@ -9632,6 +10066,10 @@
           </a:solidFill>
           <a:ln/>
         </p:spPr>
+        <p:txBody>
+          <a:bodyPr/>
+          <a:p/>
+        </p:txBody>
       </p:sp>
       <p:sp>
         <p:nvSpPr>
@@ -9703,6 +10141,10 @@
             </a:outerShdw>
           </a:effectLst>
         </p:spPr>
+        <p:txBody>
+          <a:bodyPr/>
+          <a:p/>
+        </p:txBody>
       </p:sp>
       <p:sp>
         <p:nvSpPr>
@@ -9723,6 +10165,10 @@
           </a:solidFill>
           <a:ln/>
         </p:spPr>
+        <p:txBody>
+          <a:bodyPr/>
+          <a:p/>
+        </p:txBody>
       </p:sp>
       <p:sp>
         <p:nvSpPr>
@@ -9794,6 +10240,10 @@
             </a:outerShdw>
           </a:effectLst>
         </p:spPr>
+        <p:txBody>
+          <a:bodyPr/>
+          <a:p/>
+        </p:txBody>
       </p:sp>
       <p:sp>
         <p:nvSpPr>
@@ -9814,6 +10264,10 @@
           </a:solidFill>
           <a:ln/>
         </p:spPr>
+        <p:txBody>
+          <a:bodyPr/>
+          <a:p/>
+        </p:txBody>
       </p:sp>
       <p:sp>
         <p:nvSpPr>
@@ -9885,6 +10339,10 @@
             </a:outerShdw>
           </a:effectLst>
         </p:spPr>
+        <p:txBody>
+          <a:bodyPr/>
+          <a:p/>
+        </p:txBody>
       </p:sp>
       <p:sp>
         <p:nvSpPr>
@@ -9905,6 +10363,10 @@
           </a:solidFill>
           <a:ln/>
         </p:spPr>
+        <p:txBody>
+          <a:bodyPr/>
+          <a:p/>
+        </p:txBody>
       </p:sp>
       <p:sp>
         <p:nvSpPr>
@@ -9976,6 +10438,10 @@
             </a:outerShdw>
           </a:effectLst>
         </p:spPr>
+        <p:txBody>
+          <a:bodyPr/>
+          <a:p/>
+        </p:txBody>
       </p:sp>
       <p:sp>
         <p:nvSpPr>
@@ -9996,6 +10462,10 @@
           </a:solidFill>
           <a:ln/>
         </p:spPr>
+        <p:txBody>
+          <a:bodyPr/>
+          <a:p/>
+        </p:txBody>
       </p:sp>
       <p:sp>
         <p:nvSpPr>
@@ -10069,9 +10539,3394 @@
                 <a:ea typeface="Calibri" pitchFamily="34" charset="-122"/>
                 <a:cs typeface="Calibri" pitchFamily="34" charset="-120"/>
               </a:rPr>
-              <a:t>2 / 19</a:t>
+              <a:t>2 / 21</a:t>
             </a:r>
             <a:endParaRPr lang="en-US" sz="900" dirty="0"/>
+          </a:p>
+        </p:txBody>
+      </p:sp>
+    </p:spTree>
+  </p:cSld>
+  <p:clrMapOvr>
+    <a:masterClrMapping/>
+  </p:clrMapOvr>
+</p:sld>
+</file>
+
+<file path=ppt/slides/slide20.xml><?xml version="1.0" encoding="utf-8"?>
+<p:sld xmlns:a="http://schemas.openxmlformats.org/drawingml/2006/main" xmlns:p="http://schemas.openxmlformats.org/presentationml/2006/main" xmlns:r="http://schemas.openxmlformats.org/officeDocument/2006/relationships">
+  <p:cSld>
+    <p:bg>
+      <p:bgPr>
+        <a:solidFill>
+          <a:srgbClr val="F8FAFC"/>
+        </a:solidFill>
+        <a:effectLst/>
+      </p:bgPr>
+    </p:bg>
+    <p:spTree>
+      <p:nvGrpSpPr>
+        <p:cNvPr id="1" name=""/>
+        <p:cNvGrpSpPr/>
+        <p:nvPr/>
+      </p:nvGrpSpPr>
+      <p:grpSpPr/>
+      <p:sp>
+        <p:nvSpPr>
+          <p:cNvPr id="2" name="TextBox 1"/>
+          <p:cNvSpPr txBox="1"/>
+          <p:nvPr/>
+        </p:nvSpPr>
+        <p:spPr>
+          <a:xfrm>
+            <a:off x="640080" y="320040"/>
+            <a:ext cx="7863840" cy="502920"/>
+          </a:xfrm>
+          <a:prstGeom prst="rect">
+            <a:avLst/>
+          </a:prstGeom>
+          <a:noFill/>
+        </p:spPr>
+        <p:txBody>
+          <a:bodyPr wrap="square" anchor="t" lIns="0" rIns="0" tIns="0" bIns="0">
+            <a:spAutoFit/>
+          </a:bodyPr>
+          <a:lstStyle/>
+          <a:p>
+            <a:pPr algn="l"/>
+            <a:r>
+              <a:rPr sz="2800" b="1">
+                <a:solidFill>
+                  <a:srgbClr val="1E2761"/>
+                </a:solidFill>
+                <a:latin typeface="Arial Black"/>
+              </a:rPr>
+              <a:t>Le paysage concurrentiel VRD</a:t>
+            </a:r>
+          </a:p>
+        </p:txBody>
+      </p:sp>
+      <p:sp>
+        <p:nvSpPr>
+          <p:cNvPr id="3" name="Rectangle 2"/>
+          <p:cNvSpPr/>
+          <p:nvPr/>
+        </p:nvSpPr>
+        <p:spPr>
+          <a:xfrm>
+            <a:off x="640080" y="896112"/>
+            <a:ext cx="1097280" cy="54864"/>
+          </a:xfrm>
+          <a:prstGeom prst="rect">
+            <a:avLst/>
+          </a:prstGeom>
+          <a:solidFill>
+            <a:srgbClr val="2563EB"/>
+          </a:solidFill>
+          <a:ln>
+            <a:noFill/>
+          </a:ln>
+          <a:effectLst/>
+        </p:spPr>
+        <p:style>
+          <a:lnRef idx="1">
+            <a:schemeClr val="accent1"/>
+          </a:lnRef>
+          <a:fillRef idx="3">
+            <a:schemeClr val="accent1"/>
+          </a:fillRef>
+          <a:effectRef idx="2">
+            <a:schemeClr val="accent1"/>
+          </a:effectRef>
+          <a:fontRef idx="minor">
+            <a:schemeClr val="lt1"/>
+          </a:fontRef>
+        </p:style>
+        <p:txBody>
+          <a:bodyPr rtlCol="0" anchor="ctr"/>
+          <a:lstStyle/>
+          <a:p>
+            <a:pPr algn="ctr"/>
+          </a:p>
+        </p:txBody>
+      </p:sp>
+      <p:sp>
+        <p:nvSpPr>
+          <p:cNvPr id="4" name="TextBox 3"/>
+          <p:cNvSpPr txBox="1"/>
+          <p:nvPr/>
+        </p:nvSpPr>
+        <p:spPr>
+          <a:xfrm>
+            <a:off x="640080" y="1024128"/>
+            <a:ext cx="7863840" cy="320040"/>
+          </a:xfrm>
+          <a:prstGeom prst="rect">
+            <a:avLst/>
+          </a:prstGeom>
+          <a:noFill/>
+        </p:spPr>
+        <p:txBody>
+          <a:bodyPr wrap="square" anchor="t" lIns="0" rIns="0" tIns="0" bIns="0">
+            <a:spAutoFit/>
+          </a:bodyPr>
+          <a:lstStyle/>
+          <a:p>
+            <a:pPr algn="l"/>
+            <a:r>
+              <a:rPr sz="1300" b="0">
+                <a:solidFill>
+                  <a:srgbClr val="64748B"/>
+                </a:solidFill>
+                <a:latin typeface="Calibri"/>
+              </a:rPr>
+              <a:t>Aucun produit existant ne couvre le cycle complet de la MOE VRD</a:t>
+            </a:r>
+          </a:p>
+        </p:txBody>
+      </p:sp>
+      <p:sp>
+        <p:nvSpPr>
+          <p:cNvPr id="5" name="Rounded Rectangle 4"/>
+          <p:cNvSpPr/>
+          <p:nvPr/>
+        </p:nvSpPr>
+        <p:spPr>
+          <a:xfrm>
+            <a:off x="457200" y="1481328"/>
+            <a:ext cx="2606040" cy="1298448"/>
+          </a:xfrm>
+          <a:prstGeom prst="roundRect">
+            <a:avLst>
+              <a:gd name="adj" fmla="val 10000"/>
+            </a:avLst>
+          </a:prstGeom>
+          <a:solidFill>
+            <a:srgbClr val="FFFFFF"/>
+          </a:solidFill>
+          <a:ln w="12700">
+            <a:solidFill>
+              <a:srgbClr val="E2E8F0"/>
+            </a:solidFill>
+          </a:ln>
+          <a:effectLst/>
+        </p:spPr>
+        <p:style>
+          <a:lnRef idx="1">
+            <a:schemeClr val="accent1"/>
+          </a:lnRef>
+          <a:fillRef idx="3">
+            <a:schemeClr val="accent1"/>
+          </a:fillRef>
+          <a:effectRef idx="2">
+            <a:schemeClr val="accent1"/>
+          </a:effectRef>
+          <a:fontRef idx="minor">
+            <a:schemeClr val="lt1"/>
+          </a:fontRef>
+        </p:style>
+        <p:txBody>
+          <a:bodyPr rtlCol="0" anchor="ctr"/>
+          <a:lstStyle/>
+          <a:p>
+            <a:pPr algn="ctr"/>
+          </a:p>
+        </p:txBody>
+      </p:sp>
+      <p:sp>
+        <p:nvSpPr>
+          <p:cNvPr id="6" name="Rectangle 5"/>
+          <p:cNvSpPr/>
+          <p:nvPr/>
+        </p:nvSpPr>
+        <p:spPr>
+          <a:xfrm>
+            <a:off x="457200" y="1481328"/>
+            <a:ext cx="82296" cy="1298448"/>
+          </a:xfrm>
+          <a:prstGeom prst="rect">
+            <a:avLst/>
+          </a:prstGeom>
+          <a:solidFill>
+            <a:srgbClr val="2563EB"/>
+          </a:solidFill>
+          <a:ln>
+            <a:noFill/>
+          </a:ln>
+          <a:effectLst/>
+        </p:spPr>
+        <p:style>
+          <a:lnRef idx="1">
+            <a:schemeClr val="accent1"/>
+          </a:lnRef>
+          <a:fillRef idx="3">
+            <a:schemeClr val="accent1"/>
+          </a:fillRef>
+          <a:effectRef idx="2">
+            <a:schemeClr val="accent1"/>
+          </a:effectRef>
+          <a:fontRef idx="minor">
+            <a:schemeClr val="lt1"/>
+          </a:fontRef>
+        </p:style>
+        <p:txBody>
+          <a:bodyPr rtlCol="0" anchor="ctr"/>
+          <a:lstStyle/>
+          <a:p>
+            <a:pPr algn="ctr"/>
+          </a:p>
+        </p:txBody>
+      </p:sp>
+      <p:sp>
+        <p:nvSpPr>
+          <p:cNvPr id="7" name="TextBox 6"/>
+          <p:cNvSpPr txBox="1"/>
+          <p:nvPr/>
+        </p:nvSpPr>
+        <p:spPr>
+          <a:xfrm>
+            <a:off x="658368" y="1609344"/>
+            <a:ext cx="2295144" cy="1078992"/>
+          </a:xfrm>
+          <a:prstGeom prst="rect">
+            <a:avLst/>
+          </a:prstGeom>
+          <a:noFill/>
+        </p:spPr>
+        <p:txBody>
+          <a:bodyPr wrap="square" anchor="t" lIns="0" rIns="0" tIns="0" bIns="0">
+            <a:spAutoFit/>
+          </a:bodyPr>
+          <a:lstStyle/>
+          <a:p>
+            <a:pPr algn="l">
+              <a:spcAft>
+                <a:spcPts val="300"/>
+              </a:spcAft>
+            </a:pPr>
+            <a:r>
+              <a:rPr sz="1150" b="1">
+                <a:solidFill>
+                  <a:srgbClr val="1E2761"/>
+                </a:solidFill>
+                <a:latin typeface="Calibri"/>
+              </a:rPr>
+              <a:t>Tableur généraliste</a:t>
+            </a:r>
+          </a:p>
+          <a:p>
+            <a:pPr algn="l">
+              <a:spcAft>
+                <a:spcPts val="300"/>
+              </a:spcAft>
+            </a:pPr>
+            <a:r>
+              <a:rPr sz="900" b="0">
+                <a:solidFill>
+                  <a:srgbClr val="64748B"/>
+                </a:solidFill>
+                <a:latin typeface="Calibri"/>
+              </a:rPr>
+              <a:t>Excel  ·  Word</a:t>
+            </a:r>
+          </a:p>
+          <a:p>
+            <a:pPr algn="l">
+              <a:spcAft>
+                <a:spcPts val="300"/>
+              </a:spcAft>
+            </a:pPr>
+            <a:r>
+              <a:rPr sz="850" b="0">
+                <a:solidFill>
+                  <a:srgbClr val="EF4444"/>
+                </a:solidFill>
+                <a:latin typeface="Calibri"/>
+              </a:rPr>
+              <a:t>✗ Fragmenté, ressaisies, zéro traçabilité</a:t>
+            </a:r>
+          </a:p>
+        </p:txBody>
+      </p:sp>
+      <p:sp>
+        <p:nvSpPr>
+          <p:cNvPr id="8" name="Rounded Rectangle 7"/>
+          <p:cNvSpPr/>
+          <p:nvPr/>
+        </p:nvSpPr>
+        <p:spPr>
+          <a:xfrm>
+            <a:off x="3268980" y="1481328"/>
+            <a:ext cx="2606040" cy="1298448"/>
+          </a:xfrm>
+          <a:prstGeom prst="roundRect">
+            <a:avLst>
+              <a:gd name="adj" fmla="val 10000"/>
+            </a:avLst>
+          </a:prstGeom>
+          <a:solidFill>
+            <a:srgbClr val="FFFFFF"/>
+          </a:solidFill>
+          <a:ln w="12700">
+            <a:solidFill>
+              <a:srgbClr val="E2E8F0"/>
+            </a:solidFill>
+          </a:ln>
+          <a:effectLst/>
+        </p:spPr>
+        <p:style>
+          <a:lnRef idx="1">
+            <a:schemeClr val="accent1"/>
+          </a:lnRef>
+          <a:fillRef idx="3">
+            <a:schemeClr val="accent1"/>
+          </a:fillRef>
+          <a:effectRef idx="2">
+            <a:schemeClr val="accent1"/>
+          </a:effectRef>
+          <a:fontRef idx="minor">
+            <a:schemeClr val="lt1"/>
+          </a:fontRef>
+        </p:style>
+        <p:txBody>
+          <a:bodyPr rtlCol="0" anchor="ctr"/>
+          <a:lstStyle/>
+          <a:p>
+            <a:pPr algn="ctr"/>
+          </a:p>
+        </p:txBody>
+      </p:sp>
+      <p:sp>
+        <p:nvSpPr>
+          <p:cNvPr id="9" name="Rectangle 8"/>
+          <p:cNvSpPr/>
+          <p:nvPr/>
+        </p:nvSpPr>
+        <p:spPr>
+          <a:xfrm>
+            <a:off x="3268980" y="1481328"/>
+            <a:ext cx="82296" cy="1298448"/>
+          </a:xfrm>
+          <a:prstGeom prst="rect">
+            <a:avLst/>
+          </a:prstGeom>
+          <a:solidFill>
+            <a:srgbClr val="2563EB"/>
+          </a:solidFill>
+          <a:ln>
+            <a:noFill/>
+          </a:ln>
+          <a:effectLst/>
+        </p:spPr>
+        <p:style>
+          <a:lnRef idx="1">
+            <a:schemeClr val="accent1"/>
+          </a:lnRef>
+          <a:fillRef idx="3">
+            <a:schemeClr val="accent1"/>
+          </a:fillRef>
+          <a:effectRef idx="2">
+            <a:schemeClr val="accent1"/>
+          </a:effectRef>
+          <a:fontRef idx="minor">
+            <a:schemeClr val="lt1"/>
+          </a:fontRef>
+        </p:style>
+        <p:txBody>
+          <a:bodyPr rtlCol="0" anchor="ctr"/>
+          <a:lstStyle/>
+          <a:p>
+            <a:pPr algn="ctr"/>
+          </a:p>
+        </p:txBody>
+      </p:sp>
+      <p:sp>
+        <p:nvSpPr>
+          <p:cNvPr id="10" name="TextBox 9"/>
+          <p:cNvSpPr txBox="1"/>
+          <p:nvPr/>
+        </p:nvSpPr>
+        <p:spPr>
+          <a:xfrm>
+            <a:off x="3470148" y="1609344"/>
+            <a:ext cx="2295144" cy="1078992"/>
+          </a:xfrm>
+          <a:prstGeom prst="rect">
+            <a:avLst/>
+          </a:prstGeom>
+          <a:noFill/>
+        </p:spPr>
+        <p:txBody>
+          <a:bodyPr wrap="square" anchor="t" lIns="0" rIns="0" tIns="0" bIns="0">
+            <a:spAutoFit/>
+          </a:bodyPr>
+          <a:lstStyle/>
+          <a:p>
+            <a:pPr algn="l">
+              <a:spcAft>
+                <a:spcPts val="300"/>
+              </a:spcAft>
+            </a:pPr>
+            <a:r>
+              <a:rPr sz="1150" b="1">
+                <a:solidFill>
+                  <a:srgbClr val="1E2761"/>
+                </a:solidFill>
+                <a:latin typeface="Calibri"/>
+              </a:rPr>
+              <a:t>Logiciels de devis / métré</a:t>
+            </a:r>
+          </a:p>
+          <a:p>
+            <a:pPr algn="l">
+              <a:spcAft>
+                <a:spcPts val="300"/>
+              </a:spcAft>
+            </a:pPr>
+            <a:r>
+              <a:rPr sz="900" b="0">
+                <a:solidFill>
+                  <a:srgbClr val="64748B"/>
+                </a:solidFill>
+                <a:latin typeface="Calibri"/>
+              </a:rPr>
+              <a:t>Attic+  ·  Quick Devis  ·  Multidevis</a:t>
+            </a:r>
+          </a:p>
+          <a:p>
+            <a:pPr algn="l">
+              <a:spcAft>
+                <a:spcPts val="300"/>
+              </a:spcAft>
+            </a:pPr>
+            <a:r>
+              <a:rPr sz="850" b="0">
+                <a:solidFill>
+                  <a:srgbClr val="EF4444"/>
+                </a:solidFill>
+                <a:latin typeface="Calibri"/>
+              </a:rPr>
+              <a:t>✗ Chiffrage entreprise : ni analyse d'offres, ni suivi chantier</a:t>
+            </a:r>
+          </a:p>
+        </p:txBody>
+      </p:sp>
+      <p:sp>
+        <p:nvSpPr>
+          <p:cNvPr id="11" name="Rounded Rectangle 10"/>
+          <p:cNvSpPr/>
+          <p:nvPr/>
+        </p:nvSpPr>
+        <p:spPr>
+          <a:xfrm>
+            <a:off x="6080760" y="1481328"/>
+            <a:ext cx="2606040" cy="1298448"/>
+          </a:xfrm>
+          <a:prstGeom prst="roundRect">
+            <a:avLst>
+              <a:gd name="adj" fmla="val 10000"/>
+            </a:avLst>
+          </a:prstGeom>
+          <a:solidFill>
+            <a:srgbClr val="FFFFFF"/>
+          </a:solidFill>
+          <a:ln w="12700">
+            <a:solidFill>
+              <a:srgbClr val="E2E8F0"/>
+            </a:solidFill>
+          </a:ln>
+          <a:effectLst/>
+        </p:spPr>
+        <p:style>
+          <a:lnRef idx="1">
+            <a:schemeClr val="accent1"/>
+          </a:lnRef>
+          <a:fillRef idx="3">
+            <a:schemeClr val="accent1"/>
+          </a:fillRef>
+          <a:effectRef idx="2">
+            <a:schemeClr val="accent1"/>
+          </a:effectRef>
+          <a:fontRef idx="minor">
+            <a:schemeClr val="lt1"/>
+          </a:fontRef>
+        </p:style>
+        <p:txBody>
+          <a:bodyPr rtlCol="0" anchor="ctr"/>
+          <a:lstStyle/>
+          <a:p>
+            <a:pPr algn="ctr"/>
+          </a:p>
+        </p:txBody>
+      </p:sp>
+      <p:sp>
+        <p:nvSpPr>
+          <p:cNvPr id="12" name="Rectangle 11"/>
+          <p:cNvSpPr/>
+          <p:nvPr/>
+        </p:nvSpPr>
+        <p:spPr>
+          <a:xfrm>
+            <a:off x="6080760" y="1481328"/>
+            <a:ext cx="82296" cy="1298448"/>
+          </a:xfrm>
+          <a:prstGeom prst="rect">
+            <a:avLst/>
+          </a:prstGeom>
+          <a:solidFill>
+            <a:srgbClr val="2563EB"/>
+          </a:solidFill>
+          <a:ln>
+            <a:noFill/>
+          </a:ln>
+          <a:effectLst/>
+        </p:spPr>
+        <p:style>
+          <a:lnRef idx="1">
+            <a:schemeClr val="accent1"/>
+          </a:lnRef>
+          <a:fillRef idx="3">
+            <a:schemeClr val="accent1"/>
+          </a:fillRef>
+          <a:effectRef idx="2">
+            <a:schemeClr val="accent1"/>
+          </a:effectRef>
+          <a:fontRef idx="minor">
+            <a:schemeClr val="lt1"/>
+          </a:fontRef>
+        </p:style>
+        <p:txBody>
+          <a:bodyPr rtlCol="0" anchor="ctr"/>
+          <a:lstStyle/>
+          <a:p>
+            <a:pPr algn="ctr"/>
+          </a:p>
+        </p:txBody>
+      </p:sp>
+      <p:sp>
+        <p:nvSpPr>
+          <p:cNvPr id="13" name="TextBox 12"/>
+          <p:cNvSpPr txBox="1"/>
+          <p:nvPr/>
+        </p:nvSpPr>
+        <p:spPr>
+          <a:xfrm>
+            <a:off x="6281928" y="1609344"/>
+            <a:ext cx="2295144" cy="1078992"/>
+          </a:xfrm>
+          <a:prstGeom prst="rect">
+            <a:avLst/>
+          </a:prstGeom>
+          <a:noFill/>
+        </p:spPr>
+        <p:txBody>
+          <a:bodyPr wrap="square" anchor="t" lIns="0" rIns="0" tIns="0" bIns="0">
+            <a:spAutoFit/>
+          </a:bodyPr>
+          <a:lstStyle/>
+          <a:p>
+            <a:pPr algn="l">
+              <a:spcAft>
+                <a:spcPts val="300"/>
+              </a:spcAft>
+            </a:pPr>
+            <a:r>
+              <a:rPr sz="1150" b="1">
+                <a:solidFill>
+                  <a:srgbClr val="1E2761"/>
+                </a:solidFill>
+                <a:latin typeface="Calibri"/>
+              </a:rPr>
+              <a:t>Suite Maîtrise d'Œuvre</a:t>
+            </a:r>
+          </a:p>
+          <a:p>
+            <a:pPr algn="l">
+              <a:spcAft>
+                <a:spcPts val="300"/>
+              </a:spcAft>
+            </a:pPr>
+            <a:r>
+              <a:rPr sz="900" b="0">
+                <a:solidFill>
+                  <a:srgbClr val="64748B"/>
+                </a:solidFill>
+                <a:latin typeface="Calibri"/>
+              </a:rPr>
+              <a:t>DeviSOC</a:t>
+            </a:r>
+          </a:p>
+          <a:p>
+            <a:pPr algn="l">
+              <a:spcAft>
+                <a:spcPts val="300"/>
+              </a:spcAft>
+            </a:pPr>
+            <a:r>
+              <a:rPr sz="850" b="0">
+                <a:solidFill>
+                  <a:srgbClr val="EF4444"/>
+                </a:solidFill>
+                <a:latin typeface="Calibri"/>
+              </a:rPr>
+              <a:t>✗ Desktop, tous corps d'état (non VRD), pas de mobile terrain</a:t>
+            </a:r>
+          </a:p>
+        </p:txBody>
+      </p:sp>
+      <p:sp>
+        <p:nvSpPr>
+          <p:cNvPr id="14" name="Rounded Rectangle 13"/>
+          <p:cNvSpPr/>
+          <p:nvPr/>
+        </p:nvSpPr>
+        <p:spPr>
+          <a:xfrm>
+            <a:off x="457200" y="2907792"/>
+            <a:ext cx="2606040" cy="1298448"/>
+          </a:xfrm>
+          <a:prstGeom prst="roundRect">
+            <a:avLst>
+              <a:gd name="adj" fmla="val 10000"/>
+            </a:avLst>
+          </a:prstGeom>
+          <a:solidFill>
+            <a:srgbClr val="FFFFFF"/>
+          </a:solidFill>
+          <a:ln w="12700">
+            <a:solidFill>
+              <a:srgbClr val="E2E8F0"/>
+            </a:solidFill>
+          </a:ln>
+          <a:effectLst/>
+        </p:spPr>
+        <p:style>
+          <a:lnRef idx="1">
+            <a:schemeClr val="accent1"/>
+          </a:lnRef>
+          <a:fillRef idx="3">
+            <a:schemeClr val="accent1"/>
+          </a:fillRef>
+          <a:effectRef idx="2">
+            <a:schemeClr val="accent1"/>
+          </a:effectRef>
+          <a:fontRef idx="minor">
+            <a:schemeClr val="lt1"/>
+          </a:fontRef>
+        </p:style>
+        <p:txBody>
+          <a:bodyPr rtlCol="0" anchor="ctr"/>
+          <a:lstStyle/>
+          <a:p>
+            <a:pPr algn="ctr"/>
+          </a:p>
+        </p:txBody>
+      </p:sp>
+      <p:sp>
+        <p:nvSpPr>
+          <p:cNvPr id="15" name="Rectangle 14"/>
+          <p:cNvSpPr/>
+          <p:nvPr/>
+        </p:nvSpPr>
+        <p:spPr>
+          <a:xfrm>
+            <a:off x="457200" y="2907792"/>
+            <a:ext cx="82296" cy="1298448"/>
+          </a:xfrm>
+          <a:prstGeom prst="rect">
+            <a:avLst/>
+          </a:prstGeom>
+          <a:solidFill>
+            <a:srgbClr val="2563EB"/>
+          </a:solidFill>
+          <a:ln>
+            <a:noFill/>
+          </a:ln>
+          <a:effectLst/>
+        </p:spPr>
+        <p:style>
+          <a:lnRef idx="1">
+            <a:schemeClr val="accent1"/>
+          </a:lnRef>
+          <a:fillRef idx="3">
+            <a:schemeClr val="accent1"/>
+          </a:fillRef>
+          <a:effectRef idx="2">
+            <a:schemeClr val="accent1"/>
+          </a:effectRef>
+          <a:fontRef idx="minor">
+            <a:schemeClr val="lt1"/>
+          </a:fontRef>
+        </p:style>
+        <p:txBody>
+          <a:bodyPr rtlCol="0" anchor="ctr"/>
+          <a:lstStyle/>
+          <a:p>
+            <a:pPr algn="ctr"/>
+          </a:p>
+        </p:txBody>
+      </p:sp>
+      <p:sp>
+        <p:nvSpPr>
+          <p:cNvPr id="16" name="TextBox 15"/>
+          <p:cNvSpPr txBox="1"/>
+          <p:nvPr/>
+        </p:nvSpPr>
+        <p:spPr>
+          <a:xfrm>
+            <a:off x="658368" y="3035808"/>
+            <a:ext cx="2295144" cy="1078992"/>
+          </a:xfrm>
+          <a:prstGeom prst="rect">
+            <a:avLst/>
+          </a:prstGeom>
+          <a:noFill/>
+        </p:spPr>
+        <p:txBody>
+          <a:bodyPr wrap="square" anchor="t" lIns="0" rIns="0" tIns="0" bIns="0">
+            <a:spAutoFit/>
+          </a:bodyPr>
+          <a:lstStyle/>
+          <a:p>
+            <a:pPr algn="l">
+              <a:spcAft>
+                <a:spcPts val="300"/>
+              </a:spcAft>
+            </a:pPr>
+            <a:r>
+              <a:rPr sz="1150" b="1">
+                <a:solidFill>
+                  <a:srgbClr val="1E2761"/>
+                </a:solidFill>
+                <a:latin typeface="Calibri"/>
+              </a:rPr>
+              <a:t>ERP Travaux Publics</a:t>
+            </a:r>
+          </a:p>
+          <a:p>
+            <a:pPr algn="l">
+              <a:spcAft>
+                <a:spcPts val="300"/>
+              </a:spcAft>
+            </a:pPr>
+            <a:r>
+              <a:rPr sz="900" b="0">
+                <a:solidFill>
+                  <a:srgbClr val="64748B"/>
+                </a:solidFill>
+                <a:latin typeface="Calibri"/>
+              </a:rPr>
+              <a:t>Onaya</a:t>
+            </a:r>
+          </a:p>
+          <a:p>
+            <a:pPr algn="l">
+              <a:spcAft>
+                <a:spcPts val="300"/>
+              </a:spcAft>
+            </a:pPr>
+            <a:r>
+              <a:rPr sz="850" b="0">
+                <a:solidFill>
+                  <a:srgbClr val="EF4444"/>
+                </a:solidFill>
+                <a:latin typeface="Calibri"/>
+              </a:rPr>
+              <a:t>✗ Orienté entreprise TP (sous-détails), lourd, desktop, pas MOE</a:t>
+            </a:r>
+          </a:p>
+        </p:txBody>
+      </p:sp>
+      <p:sp>
+        <p:nvSpPr>
+          <p:cNvPr id="17" name="Rounded Rectangle 16"/>
+          <p:cNvSpPr/>
+          <p:nvPr/>
+        </p:nvSpPr>
+        <p:spPr>
+          <a:xfrm>
+            <a:off x="3268980" y="2907792"/>
+            <a:ext cx="2606040" cy="1298448"/>
+          </a:xfrm>
+          <a:prstGeom prst="roundRect">
+            <a:avLst>
+              <a:gd name="adj" fmla="val 10000"/>
+            </a:avLst>
+          </a:prstGeom>
+          <a:solidFill>
+            <a:srgbClr val="FFFFFF"/>
+          </a:solidFill>
+          <a:ln w="12700">
+            <a:solidFill>
+              <a:srgbClr val="E2E8F0"/>
+            </a:solidFill>
+          </a:ln>
+          <a:effectLst/>
+        </p:spPr>
+        <p:style>
+          <a:lnRef idx="1">
+            <a:schemeClr val="accent1"/>
+          </a:lnRef>
+          <a:fillRef idx="3">
+            <a:schemeClr val="accent1"/>
+          </a:fillRef>
+          <a:effectRef idx="2">
+            <a:schemeClr val="accent1"/>
+          </a:effectRef>
+          <a:fontRef idx="minor">
+            <a:schemeClr val="lt1"/>
+          </a:fontRef>
+        </p:style>
+        <p:txBody>
+          <a:bodyPr rtlCol="0" anchor="ctr"/>
+          <a:lstStyle/>
+          <a:p>
+            <a:pPr algn="ctr"/>
+          </a:p>
+        </p:txBody>
+      </p:sp>
+      <p:sp>
+        <p:nvSpPr>
+          <p:cNvPr id="18" name="Rectangle 17"/>
+          <p:cNvSpPr/>
+          <p:nvPr/>
+        </p:nvSpPr>
+        <p:spPr>
+          <a:xfrm>
+            <a:off x="3268980" y="2907792"/>
+            <a:ext cx="82296" cy="1298448"/>
+          </a:xfrm>
+          <a:prstGeom prst="rect">
+            <a:avLst/>
+          </a:prstGeom>
+          <a:solidFill>
+            <a:srgbClr val="2563EB"/>
+          </a:solidFill>
+          <a:ln>
+            <a:noFill/>
+          </a:ln>
+          <a:effectLst/>
+        </p:spPr>
+        <p:style>
+          <a:lnRef idx="1">
+            <a:schemeClr val="accent1"/>
+          </a:lnRef>
+          <a:fillRef idx="3">
+            <a:schemeClr val="accent1"/>
+          </a:fillRef>
+          <a:effectRef idx="2">
+            <a:schemeClr val="accent1"/>
+          </a:effectRef>
+          <a:fontRef idx="minor">
+            <a:schemeClr val="lt1"/>
+          </a:fontRef>
+        </p:style>
+        <p:txBody>
+          <a:bodyPr rtlCol="0" anchor="ctr"/>
+          <a:lstStyle/>
+          <a:p>
+            <a:pPr algn="ctr"/>
+          </a:p>
+        </p:txBody>
+      </p:sp>
+      <p:sp>
+        <p:nvSpPr>
+          <p:cNvPr id="19" name="TextBox 18"/>
+          <p:cNvSpPr txBox="1"/>
+          <p:nvPr/>
+        </p:nvSpPr>
+        <p:spPr>
+          <a:xfrm>
+            <a:off x="3470148" y="3035808"/>
+            <a:ext cx="2295144" cy="1078992"/>
+          </a:xfrm>
+          <a:prstGeom prst="rect">
+            <a:avLst/>
+          </a:prstGeom>
+          <a:noFill/>
+        </p:spPr>
+        <p:txBody>
+          <a:bodyPr wrap="square" anchor="t" lIns="0" rIns="0" tIns="0" bIns="0">
+            <a:spAutoFit/>
+          </a:bodyPr>
+          <a:lstStyle/>
+          <a:p>
+            <a:pPr algn="l">
+              <a:spcAft>
+                <a:spcPts val="300"/>
+              </a:spcAft>
+            </a:pPr>
+            <a:r>
+              <a:rPr sz="1150" b="1">
+                <a:solidFill>
+                  <a:srgbClr val="1E2761"/>
+                </a:solidFill>
+                <a:latin typeface="Calibri"/>
+              </a:rPr>
+              <a:t>Apps de chantier</a:t>
+            </a:r>
+          </a:p>
+          <a:p>
+            <a:pPr algn="l">
+              <a:spcAft>
+                <a:spcPts val="300"/>
+              </a:spcAft>
+            </a:pPr>
+            <a:r>
+              <a:rPr sz="900" b="0">
+                <a:solidFill>
+                  <a:srgbClr val="64748B"/>
+                </a:solidFill>
+                <a:latin typeface="Calibri"/>
+              </a:rPr>
+              <a:t>Finalcad  ·  Alobees  ·  Kroqi</a:t>
+            </a:r>
+          </a:p>
+          <a:p>
+            <a:pPr algn="l">
+              <a:spcAft>
+                <a:spcPts val="300"/>
+              </a:spcAft>
+            </a:pPr>
+            <a:r>
+              <a:rPr sz="850" b="0">
+                <a:solidFill>
+                  <a:srgbClr val="EF4444"/>
+                </a:solidFill>
+                <a:latin typeface="Calibri"/>
+              </a:rPr>
+              <a:t>✗ Suivi terrain uniquement : aucune estimation ni analyse</a:t>
+            </a:r>
+          </a:p>
+        </p:txBody>
+      </p:sp>
+      <p:sp>
+        <p:nvSpPr>
+          <p:cNvPr id="20" name="Rounded Rectangle 19"/>
+          <p:cNvSpPr/>
+          <p:nvPr/>
+        </p:nvSpPr>
+        <p:spPr>
+          <a:xfrm>
+            <a:off x="6080760" y="2907792"/>
+            <a:ext cx="2606040" cy="1298448"/>
+          </a:xfrm>
+          <a:prstGeom prst="roundRect">
+            <a:avLst>
+              <a:gd name="adj" fmla="val 10000"/>
+            </a:avLst>
+          </a:prstGeom>
+          <a:solidFill>
+            <a:srgbClr val="FFFFFF"/>
+          </a:solidFill>
+          <a:ln w="12700">
+            <a:solidFill>
+              <a:srgbClr val="E2E8F0"/>
+            </a:solidFill>
+          </a:ln>
+          <a:effectLst/>
+        </p:spPr>
+        <p:style>
+          <a:lnRef idx="1">
+            <a:schemeClr val="accent1"/>
+          </a:lnRef>
+          <a:fillRef idx="3">
+            <a:schemeClr val="accent1"/>
+          </a:fillRef>
+          <a:effectRef idx="2">
+            <a:schemeClr val="accent1"/>
+          </a:effectRef>
+          <a:fontRef idx="minor">
+            <a:schemeClr val="lt1"/>
+          </a:fontRef>
+        </p:style>
+        <p:txBody>
+          <a:bodyPr rtlCol="0" anchor="ctr"/>
+          <a:lstStyle/>
+          <a:p>
+            <a:pPr algn="ctr"/>
+          </a:p>
+        </p:txBody>
+      </p:sp>
+      <p:sp>
+        <p:nvSpPr>
+          <p:cNvPr id="21" name="Rectangle 20"/>
+          <p:cNvSpPr/>
+          <p:nvPr/>
+        </p:nvSpPr>
+        <p:spPr>
+          <a:xfrm>
+            <a:off x="6080760" y="2907792"/>
+            <a:ext cx="82296" cy="1298448"/>
+          </a:xfrm>
+          <a:prstGeom prst="rect">
+            <a:avLst/>
+          </a:prstGeom>
+          <a:solidFill>
+            <a:srgbClr val="94A3B8"/>
+          </a:solidFill>
+          <a:ln>
+            <a:noFill/>
+          </a:ln>
+          <a:effectLst/>
+        </p:spPr>
+        <p:style>
+          <a:lnRef idx="1">
+            <a:schemeClr val="accent1"/>
+          </a:lnRef>
+          <a:fillRef idx="3">
+            <a:schemeClr val="accent1"/>
+          </a:fillRef>
+          <a:effectRef idx="2">
+            <a:schemeClr val="accent1"/>
+          </a:effectRef>
+          <a:fontRef idx="minor">
+            <a:schemeClr val="lt1"/>
+          </a:fontRef>
+        </p:style>
+        <p:txBody>
+          <a:bodyPr rtlCol="0" anchor="ctr"/>
+          <a:lstStyle/>
+          <a:p>
+            <a:pPr algn="ctr"/>
+          </a:p>
+        </p:txBody>
+      </p:sp>
+      <p:sp>
+        <p:nvSpPr>
+          <p:cNvPr id="22" name="TextBox 21"/>
+          <p:cNvSpPr txBox="1"/>
+          <p:nvPr/>
+        </p:nvSpPr>
+        <p:spPr>
+          <a:xfrm>
+            <a:off x="6281928" y="3035808"/>
+            <a:ext cx="2295144" cy="1078992"/>
+          </a:xfrm>
+          <a:prstGeom prst="rect">
+            <a:avLst/>
+          </a:prstGeom>
+          <a:noFill/>
+        </p:spPr>
+        <p:txBody>
+          <a:bodyPr wrap="square" anchor="t" lIns="0" rIns="0" tIns="0" bIns="0">
+            <a:spAutoFit/>
+          </a:bodyPr>
+          <a:lstStyle/>
+          <a:p>
+            <a:pPr algn="l">
+              <a:spcAft>
+                <a:spcPts val="300"/>
+              </a:spcAft>
+            </a:pPr>
+            <a:r>
+              <a:rPr sz="1150" b="1">
+                <a:solidFill>
+                  <a:srgbClr val="1E2761"/>
+                </a:solidFill>
+                <a:latin typeface="Calibri"/>
+              </a:rPr>
+              <a:t>Conception VRD (DAO)</a:t>
+            </a:r>
+          </a:p>
+          <a:p>
+            <a:pPr algn="l">
+              <a:spcAft>
+                <a:spcPts val="300"/>
+              </a:spcAft>
+            </a:pPr>
+            <a:r>
+              <a:rPr sz="900" b="0">
+                <a:solidFill>
+                  <a:srgbClr val="64748B"/>
+                </a:solidFill>
+                <a:latin typeface="Calibri"/>
+              </a:rPr>
+              <a:t>Mensura  ·  Covadis  ·  AutoPISTE</a:t>
+            </a:r>
+          </a:p>
+          <a:p>
+            <a:pPr algn="l">
+              <a:spcAft>
+                <a:spcPts val="300"/>
+              </a:spcAft>
+            </a:pPr>
+            <a:r>
+              <a:rPr sz="850" b="0">
+                <a:solidFill>
+                  <a:srgbClr val="64748B"/>
+                </a:solidFill>
+                <a:latin typeface="Calibri"/>
+              </a:rPr>
+              <a:t>~ Complémentaire : conçoivent, ne chiffrent/gèrent pas le marché</a:t>
+            </a:r>
+          </a:p>
+        </p:txBody>
+      </p:sp>
+      <p:sp>
+        <p:nvSpPr>
+          <p:cNvPr id="23" name="Rounded Rectangle 22"/>
+          <p:cNvSpPr/>
+          <p:nvPr/>
+        </p:nvSpPr>
+        <p:spPr>
+          <a:xfrm>
+            <a:off x="457200" y="4370832"/>
+            <a:ext cx="8229600" cy="475488"/>
+          </a:xfrm>
+          <a:prstGeom prst="roundRect">
+            <a:avLst>
+              <a:gd name="adj" fmla="val 18000"/>
+            </a:avLst>
+          </a:prstGeom>
+          <a:solidFill>
+            <a:srgbClr val="2563EB"/>
+          </a:solidFill>
+          <a:ln>
+            <a:noFill/>
+          </a:ln>
+          <a:effectLst/>
+        </p:spPr>
+        <p:style>
+          <a:lnRef idx="1">
+            <a:schemeClr val="accent1"/>
+          </a:lnRef>
+          <a:fillRef idx="3">
+            <a:schemeClr val="accent1"/>
+          </a:fillRef>
+          <a:effectRef idx="2">
+            <a:schemeClr val="accent1"/>
+          </a:effectRef>
+          <a:fontRef idx="minor">
+            <a:schemeClr val="lt1"/>
+          </a:fontRef>
+        </p:style>
+        <p:txBody>
+          <a:bodyPr rtlCol="0" anchor="ctr"/>
+          <a:lstStyle/>
+          <a:p>
+            <a:pPr algn="ctr"/>
+          </a:p>
+        </p:txBody>
+      </p:sp>
+      <p:sp>
+        <p:nvSpPr>
+          <p:cNvPr id="24" name="TextBox 23"/>
+          <p:cNvSpPr txBox="1"/>
+          <p:nvPr/>
+        </p:nvSpPr>
+        <p:spPr>
+          <a:xfrm>
+            <a:off x="457200" y="4370832"/>
+            <a:ext cx="8229600" cy="475488"/>
+          </a:xfrm>
+          <a:prstGeom prst="rect">
+            <a:avLst/>
+          </a:prstGeom>
+          <a:noFill/>
+        </p:spPr>
+        <p:txBody>
+          <a:bodyPr wrap="square" anchor="ctr" lIns="0" rIns="0" tIns="0" bIns="0">
+            <a:spAutoFit/>
+          </a:bodyPr>
+          <a:lstStyle/>
+          <a:p>
+            <a:pPr algn="ctr"/>
+            <a:r>
+              <a:rPr sz="1200" b="1">
+                <a:solidFill>
+                  <a:srgbClr val="FFFFFF"/>
+                </a:solidFill>
+                <a:latin typeface="Calibri"/>
+              </a:rPr>
+              <a:t>ESTIMA VRD réunit seul : spécialisation VRD  +  cycle MOE complet  +  terrain mobile  —  en SaaS, sans installation.</a:t>
+            </a:r>
+          </a:p>
+        </p:txBody>
+      </p:sp>
+      <p:sp>
+        <p:nvSpPr>
+          <p:cNvPr id="25" name="TextBox 24"/>
+          <p:cNvSpPr txBox="1"/>
+          <p:nvPr/>
+        </p:nvSpPr>
+        <p:spPr>
+          <a:xfrm>
+            <a:off x="8046720" y="4754880"/>
+            <a:ext cx="914400" cy="274320"/>
+          </a:xfrm>
+          <a:prstGeom prst="rect">
+            <a:avLst/>
+          </a:prstGeom>
+          <a:noFill/>
+        </p:spPr>
+        <p:txBody>
+          <a:bodyPr wrap="square" anchor="t" lIns="0" rIns="0" tIns="0" bIns="0">
+            <a:spAutoFit/>
+          </a:bodyPr>
+          <a:lstStyle/>
+          <a:p>
+            <a:pPr algn="r"/>
+            <a:r>
+              <a:rPr sz="900" b="0">
+                <a:solidFill>
+                  <a:srgbClr val="94A3B8"/>
+                </a:solidFill>
+                <a:latin typeface="Calibri"/>
+              </a:rPr>
+              <a:t>19 / 21</a:t>
+            </a:r>
+          </a:p>
+        </p:txBody>
+      </p:sp>
+    </p:spTree>
+  </p:cSld>
+  <p:clrMapOvr>
+    <a:masterClrMapping/>
+  </p:clrMapOvr>
+</p:sld>
+</file>
+
+<file path=ppt/slides/slide21.xml><?xml version="1.0" encoding="utf-8"?>
+<p:sld xmlns:a="http://schemas.openxmlformats.org/drawingml/2006/main" xmlns:p="http://schemas.openxmlformats.org/presentationml/2006/main" xmlns:r="http://schemas.openxmlformats.org/officeDocument/2006/relationships">
+  <p:cSld>
+    <p:bg>
+      <p:bgPr>
+        <a:solidFill>
+          <a:srgbClr val="F8FAFC"/>
+        </a:solidFill>
+        <a:effectLst/>
+      </p:bgPr>
+    </p:bg>
+    <p:spTree>
+      <p:nvGrpSpPr>
+        <p:cNvPr id="1" name=""/>
+        <p:cNvGrpSpPr/>
+        <p:nvPr/>
+      </p:nvGrpSpPr>
+      <p:grpSpPr/>
+      <p:sp>
+        <p:nvSpPr>
+          <p:cNvPr id="2" name="TextBox 1"/>
+          <p:cNvSpPr txBox="1"/>
+          <p:nvPr/>
+        </p:nvSpPr>
+        <p:spPr>
+          <a:xfrm>
+            <a:off x="640080" y="320040"/>
+            <a:ext cx="7863840" cy="502920"/>
+          </a:xfrm>
+          <a:prstGeom prst="rect">
+            <a:avLst/>
+          </a:prstGeom>
+          <a:noFill/>
+        </p:spPr>
+        <p:txBody>
+          <a:bodyPr wrap="square" anchor="t" lIns="0" rIns="0" tIns="0" bIns="0">
+            <a:spAutoFit/>
+          </a:bodyPr>
+          <a:lstStyle/>
+          <a:p>
+            <a:pPr algn="l"/>
+            <a:r>
+              <a:rPr sz="2800" b="1">
+                <a:solidFill>
+                  <a:srgbClr val="1E2761"/>
+                </a:solidFill>
+                <a:latin typeface="Arial Black"/>
+              </a:rPr>
+              <a:t>Comparatif fonctionnel</a:t>
+            </a:r>
+          </a:p>
+        </p:txBody>
+      </p:sp>
+      <p:sp>
+        <p:nvSpPr>
+          <p:cNvPr id="3" name="Rectangle 2"/>
+          <p:cNvSpPr/>
+          <p:nvPr/>
+        </p:nvSpPr>
+        <p:spPr>
+          <a:xfrm>
+            <a:off x="640080" y="896112"/>
+            <a:ext cx="1097280" cy="54864"/>
+          </a:xfrm>
+          <a:prstGeom prst="rect">
+            <a:avLst/>
+          </a:prstGeom>
+          <a:solidFill>
+            <a:srgbClr val="2563EB"/>
+          </a:solidFill>
+          <a:ln>
+            <a:noFill/>
+          </a:ln>
+          <a:effectLst/>
+        </p:spPr>
+        <p:style>
+          <a:lnRef idx="1">
+            <a:schemeClr val="accent1"/>
+          </a:lnRef>
+          <a:fillRef idx="3">
+            <a:schemeClr val="accent1"/>
+          </a:fillRef>
+          <a:effectRef idx="2">
+            <a:schemeClr val="accent1"/>
+          </a:effectRef>
+          <a:fontRef idx="minor">
+            <a:schemeClr val="lt1"/>
+          </a:fontRef>
+        </p:style>
+        <p:txBody>
+          <a:bodyPr rtlCol="0" anchor="ctr"/>
+          <a:lstStyle/>
+          <a:p>
+            <a:pPr algn="ctr"/>
+          </a:p>
+        </p:txBody>
+      </p:sp>
+      <p:sp>
+        <p:nvSpPr>
+          <p:cNvPr id="4" name="TextBox 3"/>
+          <p:cNvSpPr txBox="1"/>
+          <p:nvPr/>
+        </p:nvSpPr>
+        <p:spPr>
+          <a:xfrm>
+            <a:off x="640080" y="1024128"/>
+            <a:ext cx="7863840" cy="320040"/>
+          </a:xfrm>
+          <a:prstGeom prst="rect">
+            <a:avLst/>
+          </a:prstGeom>
+          <a:noFill/>
+        </p:spPr>
+        <p:txBody>
+          <a:bodyPr wrap="square" anchor="t" lIns="0" rIns="0" tIns="0" bIns="0">
+            <a:spAutoFit/>
+          </a:bodyPr>
+          <a:lstStyle/>
+          <a:p>
+            <a:pPr algn="l"/>
+            <a:r>
+              <a:rPr sz="1300" b="0">
+                <a:solidFill>
+                  <a:srgbClr val="64748B"/>
+                </a:solidFill>
+                <a:latin typeface="Calibri"/>
+              </a:rPr>
+              <a:t>ESTIMA VRD face aux 5 familles de produits du marché</a:t>
+            </a:r>
+          </a:p>
+        </p:txBody>
+      </p:sp>
+      <p:graphicFrame>
+        <p:nvGraphicFramePr>
+          <p:cNvPr id="5" name="Table 4"/>
+          <p:cNvGraphicFramePr>
+            <a:graphicFrameLocks noGrp="1"/>
+          </p:cNvGraphicFramePr>
+          <p:nvPr/>
+        </p:nvGraphicFramePr>
+        <p:xfrm>
+          <a:off x="457200" y="1463040"/>
+          <a:ext cx="8229600" cy="3063238"/>
+        </p:xfrm>
+        <a:graphic>
+          <a:graphicData uri="http://schemas.openxmlformats.org/drawingml/2006/table">
+            <a:tbl>
+              <a:tblPr>
+                <a:tableStyleId>{5C22544A-7EE6-4342-B048-85BDC9FD1C3A}</a:tableStyleId>
+              </a:tblPr>
+              <a:tblGrid>
+                <a:gridCol w="2514600"/>
+                <a:gridCol w="952500"/>
+                <a:gridCol w="952500"/>
+                <a:gridCol w="952500"/>
+                <a:gridCol w="952500"/>
+                <a:gridCol w="952500"/>
+                <a:gridCol w="952500"/>
+              </a:tblGrid>
+              <a:tr h="475488">
+                <a:tc>
+                  <a:txBody>
+                    <a:bodyPr wrap="square"/>
+                    <a:lstStyle/>
+                    <a:p>
+                      <a:pPr algn="l"/>
+                      <a:r>
+                        <a:rPr sz="1000" b="1">
+                          <a:solidFill>
+                            <a:srgbClr val="FFFFFF"/>
+                          </a:solidFill>
+                          <a:latin typeface="Calibri"/>
+                        </a:rPr>
+                        <a:t>Capacité clé</a:t>
+                      </a:r>
+                    </a:p>
+                  </a:txBody>
+                  <a:tcPr anchor="ctr" marL="54864" marR="36576" marT="0" marB="0">
+                    <a:solidFill>
+                      <a:srgbClr val="1E2761"/>
+                    </a:solidFill>
+                  </a:tcPr>
+                </a:tc>
+                <a:tc>
+                  <a:txBody>
+                    <a:bodyPr wrap="square"/>
+                    <a:lstStyle/>
+                    <a:p>
+                      <a:pPr algn="ctr"/>
+                      <a:r>
+                        <a:rPr sz="950" b="1">
+                          <a:solidFill>
+                            <a:srgbClr val="FFFFFF"/>
+                          </a:solidFill>
+                          <a:latin typeface="Calibri"/>
+                        </a:rPr>
+                        <a:t>ESTIMA</a:t>
+                      </a:r>
+                    </a:p>
+                    <a:p>
+                      <a:pPr algn="ctr"/>
+                      <a:r>
+                        <a:rPr sz="950" b="1">
+                          <a:solidFill>
+                            <a:srgbClr val="FFFFFF"/>
+                          </a:solidFill>
+                          <a:latin typeface="Calibri"/>
+                        </a:rPr>
+                        <a:t>VRD</a:t>
+                      </a:r>
+                    </a:p>
+                  </a:txBody>
+                  <a:tcPr anchor="ctr" marL="54864" marR="36576" marT="0" marB="0">
+                    <a:solidFill>
+                      <a:srgbClr val="2563EB"/>
+                    </a:solidFill>
+                  </a:tcPr>
+                </a:tc>
+                <a:tc>
+                  <a:txBody>
+                    <a:bodyPr wrap="square"/>
+                    <a:lstStyle/>
+                    <a:p>
+                      <a:pPr algn="ctr"/>
+                      <a:r>
+                        <a:rPr sz="850" b="1">
+                          <a:solidFill>
+                            <a:srgbClr val="1E2761"/>
+                          </a:solidFill>
+                          <a:latin typeface="Calibri"/>
+                        </a:rPr>
+                        <a:t>Suite MOE</a:t>
+                      </a:r>
+                    </a:p>
+                    <a:p>
+                      <a:pPr algn="ctr"/>
+                      <a:r>
+                        <a:rPr sz="850" b="1">
+                          <a:solidFill>
+                            <a:srgbClr val="1E2761"/>
+                          </a:solidFill>
+                          <a:latin typeface="Calibri"/>
+                        </a:rPr>
+                        <a:t>(DeviSOC)</a:t>
+                      </a:r>
+                    </a:p>
+                  </a:txBody>
+                  <a:tcPr anchor="ctr" marL="54864" marR="36576" marT="0" marB="0">
+                    <a:solidFill>
+                      <a:srgbClr val="F1F5F9"/>
+                    </a:solidFill>
+                  </a:tcPr>
+                </a:tc>
+                <a:tc>
+                  <a:txBody>
+                    <a:bodyPr wrap="square"/>
+                    <a:lstStyle/>
+                    <a:p>
+                      <a:pPr algn="ctr"/>
+                      <a:r>
+                        <a:rPr sz="850" b="1">
+                          <a:solidFill>
+                            <a:srgbClr val="1E2761"/>
+                          </a:solidFill>
+                          <a:latin typeface="Calibri"/>
+                        </a:rPr>
+                        <a:t>ERP TP</a:t>
+                      </a:r>
+                    </a:p>
+                    <a:p>
+                      <a:pPr algn="ctr"/>
+                      <a:r>
+                        <a:rPr sz="850" b="1">
+                          <a:solidFill>
+                            <a:srgbClr val="1E2761"/>
+                          </a:solidFill>
+                          <a:latin typeface="Calibri"/>
+                        </a:rPr>
+                        <a:t>(Onaya)</a:t>
+                      </a:r>
+                    </a:p>
+                  </a:txBody>
+                  <a:tcPr anchor="ctr" marL="54864" marR="36576" marT="0" marB="0">
+                    <a:solidFill>
+                      <a:srgbClr val="F1F5F9"/>
+                    </a:solidFill>
+                  </a:tcPr>
+                </a:tc>
+                <a:tc>
+                  <a:txBody>
+                    <a:bodyPr wrap="square"/>
+                    <a:lstStyle/>
+                    <a:p>
+                      <a:pPr algn="ctr"/>
+                      <a:r>
+                        <a:rPr sz="850" b="1">
+                          <a:solidFill>
+                            <a:srgbClr val="1E2761"/>
+                          </a:solidFill>
+                          <a:latin typeface="Calibri"/>
+                        </a:rPr>
+                        <a:t>Devis/métré</a:t>
+                      </a:r>
+                    </a:p>
+                    <a:p>
+                      <a:pPr algn="ctr"/>
+                      <a:r>
+                        <a:rPr sz="850" b="1">
+                          <a:solidFill>
+                            <a:srgbClr val="1E2761"/>
+                          </a:solidFill>
+                          <a:latin typeface="Calibri"/>
+                        </a:rPr>
+                        <a:t>(Attic+…)</a:t>
+                      </a:r>
+                    </a:p>
+                  </a:txBody>
+                  <a:tcPr anchor="ctr" marL="54864" marR="36576" marT="0" marB="0">
+                    <a:solidFill>
+                      <a:srgbClr val="F1F5F9"/>
+                    </a:solidFill>
+                  </a:tcPr>
+                </a:tc>
+                <a:tc>
+                  <a:txBody>
+                    <a:bodyPr wrap="square"/>
+                    <a:lstStyle/>
+                    <a:p>
+                      <a:pPr algn="ctr"/>
+                      <a:r>
+                        <a:rPr sz="850" b="1">
+                          <a:solidFill>
+                            <a:srgbClr val="1E2761"/>
+                          </a:solidFill>
+                          <a:latin typeface="Calibri"/>
+                        </a:rPr>
+                        <a:t>App chantier</a:t>
+                      </a:r>
+                    </a:p>
+                    <a:p>
+                      <a:pPr algn="ctr"/>
+                      <a:r>
+                        <a:rPr sz="850" b="1">
+                          <a:solidFill>
+                            <a:srgbClr val="1E2761"/>
+                          </a:solidFill>
+                          <a:latin typeface="Calibri"/>
+                        </a:rPr>
+                        <a:t>(Finalcad…)</a:t>
+                      </a:r>
+                    </a:p>
+                  </a:txBody>
+                  <a:tcPr anchor="ctr" marL="54864" marR="36576" marT="0" marB="0">
+                    <a:solidFill>
+                      <a:srgbClr val="F1F5F9"/>
+                    </a:solidFill>
+                  </a:tcPr>
+                </a:tc>
+                <a:tc>
+                  <a:txBody>
+                    <a:bodyPr wrap="square"/>
+                    <a:lstStyle/>
+                    <a:p>
+                      <a:pPr algn="ctr"/>
+                      <a:r>
+                        <a:rPr sz="850" b="1">
+                          <a:solidFill>
+                            <a:srgbClr val="1E2761"/>
+                          </a:solidFill>
+                          <a:latin typeface="Calibri"/>
+                        </a:rPr>
+                        <a:t>Tableur</a:t>
+                      </a:r>
+                    </a:p>
+                    <a:p>
+                      <a:pPr algn="ctr"/>
+                      <a:r>
+                        <a:rPr sz="850" b="1">
+                          <a:solidFill>
+                            <a:srgbClr val="1E2761"/>
+                          </a:solidFill>
+                          <a:latin typeface="Calibri"/>
+                        </a:rPr>
+                        <a:t>(Excel)</a:t>
+                      </a:r>
+                    </a:p>
+                  </a:txBody>
+                  <a:tcPr anchor="ctr" marL="54864" marR="36576" marT="0" marB="0">
+                    <a:solidFill>
+                      <a:srgbClr val="F1F5F9"/>
+                    </a:solidFill>
+                  </a:tcPr>
+                </a:tc>
+              </a:tr>
+              <a:tr h="258775">
+                <a:tc>
+                  <a:txBody>
+                    <a:bodyPr wrap="square"/>
+                    <a:lstStyle/>
+                    <a:p>
+                      <a:pPr algn="l"/>
+                      <a:r>
+                        <a:rPr sz="900" b="0">
+                          <a:solidFill>
+                            <a:srgbClr val="1E2761"/>
+                          </a:solidFill>
+                          <a:latin typeface="Calibri"/>
+                        </a:rPr>
+                        <a:t>Spécialisation VRD + biblio prix locales</a:t>
+                      </a:r>
+                    </a:p>
+                  </a:txBody>
+                  <a:tcPr anchor="ctr" marL="54864" marR="36576" marT="0" marB="0">
+                    <a:solidFill>
+                      <a:srgbClr val="FFFFFF"/>
+                    </a:solidFill>
+                  </a:tcPr>
+                </a:tc>
+                <a:tc>
+                  <a:txBody>
+                    <a:bodyPr wrap="square"/>
+                    <a:lstStyle/>
+                    <a:p>
+                      <a:pPr algn="ctr"/>
+                      <a:r>
+                        <a:rPr sz="1250" b="1">
+                          <a:solidFill>
+                            <a:srgbClr val="10B981"/>
+                          </a:solidFill>
+                          <a:latin typeface="Calibri"/>
+                        </a:rPr>
+                        <a:t>✓</a:t>
+                      </a:r>
+                    </a:p>
+                  </a:txBody>
+                  <a:tcPr anchor="ctr" marL="54864" marR="36576" marT="0" marB="0">
+                    <a:solidFill>
+                      <a:srgbClr val="EFF6FF"/>
+                    </a:solidFill>
+                  </a:tcPr>
+                </a:tc>
+                <a:tc>
+                  <a:txBody>
+                    <a:bodyPr wrap="square"/>
+                    <a:lstStyle/>
+                    <a:p>
+                      <a:pPr algn="ctr"/>
+                      <a:r>
+                        <a:rPr sz="1250" b="1">
+                          <a:solidFill>
+                            <a:srgbClr val="F59E0B"/>
+                          </a:solidFill>
+                          <a:latin typeface="Calibri"/>
+                        </a:rPr>
+                        <a:t>~</a:t>
+                      </a:r>
+                    </a:p>
+                  </a:txBody>
+                  <a:tcPr anchor="ctr" marL="54864" marR="36576" marT="0" marB="0">
+                    <a:solidFill>
+                      <a:srgbClr val="FFFFFF"/>
+                    </a:solidFill>
+                  </a:tcPr>
+                </a:tc>
+                <a:tc>
+                  <a:txBody>
+                    <a:bodyPr wrap="square"/>
+                    <a:lstStyle/>
+                    <a:p>
+                      <a:pPr algn="ctr"/>
+                      <a:r>
+                        <a:rPr sz="1250" b="1">
+                          <a:solidFill>
+                            <a:srgbClr val="10B981"/>
+                          </a:solidFill>
+                          <a:latin typeface="Calibri"/>
+                        </a:rPr>
+                        <a:t>✓</a:t>
+                      </a:r>
+                    </a:p>
+                  </a:txBody>
+                  <a:tcPr anchor="ctr" marL="54864" marR="36576" marT="0" marB="0">
+                    <a:solidFill>
+                      <a:srgbClr val="FFFFFF"/>
+                    </a:solidFill>
+                  </a:tcPr>
+                </a:tc>
+                <a:tc>
+                  <a:txBody>
+                    <a:bodyPr wrap="square"/>
+                    <a:lstStyle/>
+                    <a:p>
+                      <a:pPr algn="ctr"/>
+                      <a:r>
+                        <a:rPr sz="1250" b="1">
+                          <a:solidFill>
+                            <a:srgbClr val="F59E0B"/>
+                          </a:solidFill>
+                          <a:latin typeface="Calibri"/>
+                        </a:rPr>
+                        <a:t>~</a:t>
+                      </a:r>
+                    </a:p>
+                  </a:txBody>
+                  <a:tcPr anchor="ctr" marL="54864" marR="36576" marT="0" marB="0">
+                    <a:solidFill>
+                      <a:srgbClr val="FFFFFF"/>
+                    </a:solidFill>
+                  </a:tcPr>
+                </a:tc>
+                <a:tc>
+                  <a:txBody>
+                    <a:bodyPr wrap="square"/>
+                    <a:lstStyle/>
+                    <a:p>
+                      <a:pPr algn="ctr"/>
+                      <a:r>
+                        <a:rPr sz="1250" b="1">
+                          <a:solidFill>
+                            <a:srgbClr val="94A3B8"/>
+                          </a:solidFill>
+                          <a:latin typeface="Calibri"/>
+                        </a:rPr>
+                        <a:t>✗</a:t>
+                      </a:r>
+                    </a:p>
+                  </a:txBody>
+                  <a:tcPr anchor="ctr" marL="54864" marR="36576" marT="0" marB="0">
+                    <a:solidFill>
+                      <a:srgbClr val="FFFFFF"/>
+                    </a:solidFill>
+                  </a:tcPr>
+                </a:tc>
+                <a:tc>
+                  <a:txBody>
+                    <a:bodyPr wrap="square"/>
+                    <a:lstStyle/>
+                    <a:p>
+                      <a:pPr algn="ctr"/>
+                      <a:r>
+                        <a:rPr sz="1250" b="1">
+                          <a:solidFill>
+                            <a:srgbClr val="94A3B8"/>
+                          </a:solidFill>
+                          <a:latin typeface="Calibri"/>
+                        </a:rPr>
+                        <a:t>✗</a:t>
+                      </a:r>
+                    </a:p>
+                  </a:txBody>
+                  <a:tcPr anchor="ctr" marL="54864" marR="36576" marT="0" marB="0">
+                    <a:solidFill>
+                      <a:srgbClr val="FFFFFF"/>
+                    </a:solidFill>
+                  </a:tcPr>
+                </a:tc>
+              </a:tr>
+              <a:tr h="258775">
+                <a:tc>
+                  <a:txBody>
+                    <a:bodyPr wrap="square"/>
+                    <a:lstStyle/>
+                    <a:p>
+                      <a:pPr algn="l"/>
+                      <a:r>
+                        <a:rPr sz="900" b="0">
+                          <a:solidFill>
+                            <a:srgbClr val="1E2761"/>
+                          </a:solidFill>
+                          <a:latin typeface="Calibri"/>
+                        </a:rPr>
+                        <a:t>Analyse des offres + détection OAB</a:t>
+                      </a:r>
+                    </a:p>
+                  </a:txBody>
+                  <a:tcPr anchor="ctr" marL="54864" marR="36576" marT="0" marB="0">
+                    <a:solidFill>
+                      <a:srgbClr val="FBFCFD"/>
+                    </a:solidFill>
+                  </a:tcPr>
+                </a:tc>
+                <a:tc>
+                  <a:txBody>
+                    <a:bodyPr wrap="square"/>
+                    <a:lstStyle/>
+                    <a:p>
+                      <a:pPr algn="ctr"/>
+                      <a:r>
+                        <a:rPr sz="1250" b="1">
+                          <a:solidFill>
+                            <a:srgbClr val="10B981"/>
+                          </a:solidFill>
+                          <a:latin typeface="Calibri"/>
+                        </a:rPr>
+                        <a:t>✓</a:t>
+                      </a:r>
+                    </a:p>
+                  </a:txBody>
+                  <a:tcPr anchor="ctr" marL="54864" marR="36576" marT="0" marB="0">
+                    <a:solidFill>
+                      <a:srgbClr val="EFF6FF"/>
+                    </a:solidFill>
+                  </a:tcPr>
+                </a:tc>
+                <a:tc>
+                  <a:txBody>
+                    <a:bodyPr wrap="square"/>
+                    <a:lstStyle/>
+                    <a:p>
+                      <a:pPr algn="ctr"/>
+                      <a:r>
+                        <a:rPr sz="1250" b="1">
+                          <a:solidFill>
+                            <a:srgbClr val="10B981"/>
+                          </a:solidFill>
+                          <a:latin typeface="Calibri"/>
+                        </a:rPr>
+                        <a:t>✓</a:t>
+                      </a:r>
+                    </a:p>
+                  </a:txBody>
+                  <a:tcPr anchor="ctr" marL="54864" marR="36576" marT="0" marB="0">
+                    <a:solidFill>
+                      <a:srgbClr val="FBFCFD"/>
+                    </a:solidFill>
+                  </a:tcPr>
+                </a:tc>
+                <a:tc>
+                  <a:txBody>
+                    <a:bodyPr wrap="square"/>
+                    <a:lstStyle/>
+                    <a:p>
+                      <a:pPr algn="ctr"/>
+                      <a:r>
+                        <a:rPr sz="1250" b="1">
+                          <a:solidFill>
+                            <a:srgbClr val="F59E0B"/>
+                          </a:solidFill>
+                          <a:latin typeface="Calibri"/>
+                        </a:rPr>
+                        <a:t>~</a:t>
+                      </a:r>
+                    </a:p>
+                  </a:txBody>
+                  <a:tcPr anchor="ctr" marL="54864" marR="36576" marT="0" marB="0">
+                    <a:solidFill>
+                      <a:srgbClr val="FBFCFD"/>
+                    </a:solidFill>
+                  </a:tcPr>
+                </a:tc>
+                <a:tc>
+                  <a:txBody>
+                    <a:bodyPr wrap="square"/>
+                    <a:lstStyle/>
+                    <a:p>
+                      <a:pPr algn="ctr"/>
+                      <a:r>
+                        <a:rPr sz="1250" b="1">
+                          <a:solidFill>
+                            <a:srgbClr val="94A3B8"/>
+                          </a:solidFill>
+                          <a:latin typeface="Calibri"/>
+                        </a:rPr>
+                        <a:t>✗</a:t>
+                      </a:r>
+                    </a:p>
+                  </a:txBody>
+                  <a:tcPr anchor="ctr" marL="54864" marR="36576" marT="0" marB="0">
+                    <a:solidFill>
+                      <a:srgbClr val="FBFCFD"/>
+                    </a:solidFill>
+                  </a:tcPr>
+                </a:tc>
+                <a:tc>
+                  <a:txBody>
+                    <a:bodyPr wrap="square"/>
+                    <a:lstStyle/>
+                    <a:p>
+                      <a:pPr algn="ctr"/>
+                      <a:r>
+                        <a:rPr sz="1250" b="1">
+                          <a:solidFill>
+                            <a:srgbClr val="94A3B8"/>
+                          </a:solidFill>
+                          <a:latin typeface="Calibri"/>
+                        </a:rPr>
+                        <a:t>✗</a:t>
+                      </a:r>
+                    </a:p>
+                  </a:txBody>
+                  <a:tcPr anchor="ctr" marL="54864" marR="36576" marT="0" marB="0">
+                    <a:solidFill>
+                      <a:srgbClr val="FBFCFD"/>
+                    </a:solidFill>
+                  </a:tcPr>
+                </a:tc>
+                <a:tc>
+                  <a:txBody>
+                    <a:bodyPr wrap="square"/>
+                    <a:lstStyle/>
+                    <a:p>
+                      <a:pPr algn="ctr"/>
+                      <a:r>
+                        <a:rPr sz="1250" b="1">
+                          <a:solidFill>
+                            <a:srgbClr val="F59E0B"/>
+                          </a:solidFill>
+                          <a:latin typeface="Calibri"/>
+                        </a:rPr>
+                        <a:t>~</a:t>
+                      </a:r>
+                    </a:p>
+                  </a:txBody>
+                  <a:tcPr anchor="ctr" marL="54864" marR="36576" marT="0" marB="0">
+                    <a:solidFill>
+                      <a:srgbClr val="FBFCFD"/>
+                    </a:solidFill>
+                  </a:tcPr>
+                </a:tc>
+              </a:tr>
+              <a:tr h="258775">
+                <a:tc>
+                  <a:txBody>
+                    <a:bodyPr wrap="square"/>
+                    <a:lstStyle/>
+                    <a:p>
+                      <a:pPr algn="l"/>
+                      <a:r>
+                        <a:rPr sz="900" b="0">
+                          <a:solidFill>
+                            <a:srgbClr val="1E2761"/>
+                          </a:solidFill>
+                          <a:latin typeface="Calibri"/>
+                        </a:rPr>
+                        <a:t>RAO notation multicritère (F1–F9)</a:t>
+                      </a:r>
+                    </a:p>
+                  </a:txBody>
+                  <a:tcPr anchor="ctr" marL="54864" marR="36576" marT="0" marB="0">
+                    <a:solidFill>
+                      <a:srgbClr val="FFFFFF"/>
+                    </a:solidFill>
+                  </a:tcPr>
+                </a:tc>
+                <a:tc>
+                  <a:txBody>
+                    <a:bodyPr wrap="square"/>
+                    <a:lstStyle/>
+                    <a:p>
+                      <a:pPr algn="ctr"/>
+                      <a:r>
+                        <a:rPr sz="1250" b="1">
+                          <a:solidFill>
+                            <a:srgbClr val="10B981"/>
+                          </a:solidFill>
+                          <a:latin typeface="Calibri"/>
+                        </a:rPr>
+                        <a:t>✓</a:t>
+                      </a:r>
+                    </a:p>
+                  </a:txBody>
+                  <a:tcPr anchor="ctr" marL="54864" marR="36576" marT="0" marB="0">
+                    <a:solidFill>
+                      <a:srgbClr val="EFF6FF"/>
+                    </a:solidFill>
+                  </a:tcPr>
+                </a:tc>
+                <a:tc>
+                  <a:txBody>
+                    <a:bodyPr wrap="square"/>
+                    <a:lstStyle/>
+                    <a:p>
+                      <a:pPr algn="ctr"/>
+                      <a:r>
+                        <a:rPr sz="1250" b="1">
+                          <a:solidFill>
+                            <a:srgbClr val="F59E0B"/>
+                          </a:solidFill>
+                          <a:latin typeface="Calibri"/>
+                        </a:rPr>
+                        <a:t>~</a:t>
+                      </a:r>
+                    </a:p>
+                  </a:txBody>
+                  <a:tcPr anchor="ctr" marL="54864" marR="36576" marT="0" marB="0">
+                    <a:solidFill>
+                      <a:srgbClr val="FFFFFF"/>
+                    </a:solidFill>
+                  </a:tcPr>
+                </a:tc>
+                <a:tc>
+                  <a:txBody>
+                    <a:bodyPr wrap="square"/>
+                    <a:lstStyle/>
+                    <a:p>
+                      <a:pPr algn="ctr"/>
+                      <a:r>
+                        <a:rPr sz="1250" b="1">
+                          <a:solidFill>
+                            <a:srgbClr val="94A3B8"/>
+                          </a:solidFill>
+                          <a:latin typeface="Calibri"/>
+                        </a:rPr>
+                        <a:t>✗</a:t>
+                      </a:r>
+                    </a:p>
+                  </a:txBody>
+                  <a:tcPr anchor="ctr" marL="54864" marR="36576" marT="0" marB="0">
+                    <a:solidFill>
+                      <a:srgbClr val="FFFFFF"/>
+                    </a:solidFill>
+                  </a:tcPr>
+                </a:tc>
+                <a:tc>
+                  <a:txBody>
+                    <a:bodyPr wrap="square"/>
+                    <a:lstStyle/>
+                    <a:p>
+                      <a:pPr algn="ctr"/>
+                      <a:r>
+                        <a:rPr sz="1250" b="1">
+                          <a:solidFill>
+                            <a:srgbClr val="94A3B8"/>
+                          </a:solidFill>
+                          <a:latin typeface="Calibri"/>
+                        </a:rPr>
+                        <a:t>✗</a:t>
+                      </a:r>
+                    </a:p>
+                  </a:txBody>
+                  <a:tcPr anchor="ctr" marL="54864" marR="36576" marT="0" marB="0">
+                    <a:solidFill>
+                      <a:srgbClr val="FFFFFF"/>
+                    </a:solidFill>
+                  </a:tcPr>
+                </a:tc>
+                <a:tc>
+                  <a:txBody>
+                    <a:bodyPr wrap="square"/>
+                    <a:lstStyle/>
+                    <a:p>
+                      <a:pPr algn="ctr"/>
+                      <a:r>
+                        <a:rPr sz="1250" b="1">
+                          <a:solidFill>
+                            <a:srgbClr val="94A3B8"/>
+                          </a:solidFill>
+                          <a:latin typeface="Calibri"/>
+                        </a:rPr>
+                        <a:t>✗</a:t>
+                      </a:r>
+                    </a:p>
+                  </a:txBody>
+                  <a:tcPr anchor="ctr" marL="54864" marR="36576" marT="0" marB="0">
+                    <a:solidFill>
+                      <a:srgbClr val="FFFFFF"/>
+                    </a:solidFill>
+                  </a:tcPr>
+                </a:tc>
+                <a:tc>
+                  <a:txBody>
+                    <a:bodyPr wrap="square"/>
+                    <a:lstStyle/>
+                    <a:p>
+                      <a:pPr algn="ctr"/>
+                      <a:r>
+                        <a:rPr sz="1250" b="1">
+                          <a:solidFill>
+                            <a:srgbClr val="F59E0B"/>
+                          </a:solidFill>
+                          <a:latin typeface="Calibri"/>
+                        </a:rPr>
+                        <a:t>~</a:t>
+                      </a:r>
+                    </a:p>
+                  </a:txBody>
+                  <a:tcPr anchor="ctr" marL="54864" marR="36576" marT="0" marB="0">
+                    <a:solidFill>
+                      <a:srgbClr val="FFFFFF"/>
+                    </a:solidFill>
+                  </a:tcPr>
+                </a:tc>
+              </a:tr>
+              <a:tr h="258775">
+                <a:tc>
+                  <a:txBody>
+                    <a:bodyPr wrap="square"/>
+                    <a:lstStyle/>
+                    <a:p>
+                      <a:pPr algn="l"/>
+                      <a:r>
+                        <a:rPr sz="900" b="0">
+                          <a:solidFill>
+                            <a:srgbClr val="1E2761"/>
+                          </a:solidFill>
+                          <a:latin typeface="Calibri"/>
+                        </a:rPr>
+                        <a:t>Générateurs CCTP / RC</a:t>
+                      </a:r>
+                    </a:p>
+                  </a:txBody>
+                  <a:tcPr anchor="ctr" marL="54864" marR="36576" marT="0" marB="0">
+                    <a:solidFill>
+                      <a:srgbClr val="FBFCFD"/>
+                    </a:solidFill>
+                  </a:tcPr>
+                </a:tc>
+                <a:tc>
+                  <a:txBody>
+                    <a:bodyPr wrap="square"/>
+                    <a:lstStyle/>
+                    <a:p>
+                      <a:pPr algn="ctr"/>
+                      <a:r>
+                        <a:rPr sz="1250" b="1">
+                          <a:solidFill>
+                            <a:srgbClr val="10B981"/>
+                          </a:solidFill>
+                          <a:latin typeface="Calibri"/>
+                        </a:rPr>
+                        <a:t>✓</a:t>
+                      </a:r>
+                    </a:p>
+                  </a:txBody>
+                  <a:tcPr anchor="ctr" marL="54864" marR="36576" marT="0" marB="0">
+                    <a:solidFill>
+                      <a:srgbClr val="EFF6FF"/>
+                    </a:solidFill>
+                  </a:tcPr>
+                </a:tc>
+                <a:tc>
+                  <a:txBody>
+                    <a:bodyPr wrap="square"/>
+                    <a:lstStyle/>
+                    <a:p>
+                      <a:pPr algn="ctr"/>
+                      <a:r>
+                        <a:rPr sz="1250" b="1">
+                          <a:solidFill>
+                            <a:srgbClr val="10B981"/>
+                          </a:solidFill>
+                          <a:latin typeface="Calibri"/>
+                        </a:rPr>
+                        <a:t>✓</a:t>
+                      </a:r>
+                    </a:p>
+                  </a:txBody>
+                  <a:tcPr anchor="ctr" marL="54864" marR="36576" marT="0" marB="0">
+                    <a:solidFill>
+                      <a:srgbClr val="FBFCFD"/>
+                    </a:solidFill>
+                  </a:tcPr>
+                </a:tc>
+                <a:tc>
+                  <a:txBody>
+                    <a:bodyPr wrap="square"/>
+                    <a:lstStyle/>
+                    <a:p>
+                      <a:pPr algn="ctr"/>
+                      <a:r>
+                        <a:rPr sz="1250" b="1">
+                          <a:solidFill>
+                            <a:srgbClr val="F59E0B"/>
+                          </a:solidFill>
+                          <a:latin typeface="Calibri"/>
+                        </a:rPr>
+                        <a:t>~</a:t>
+                      </a:r>
+                    </a:p>
+                  </a:txBody>
+                  <a:tcPr anchor="ctr" marL="54864" marR="36576" marT="0" marB="0">
+                    <a:solidFill>
+                      <a:srgbClr val="FBFCFD"/>
+                    </a:solidFill>
+                  </a:tcPr>
+                </a:tc>
+                <a:tc>
+                  <a:txBody>
+                    <a:bodyPr wrap="square"/>
+                    <a:lstStyle/>
+                    <a:p>
+                      <a:pPr algn="ctr"/>
+                      <a:r>
+                        <a:rPr sz="1250" b="1">
+                          <a:solidFill>
+                            <a:srgbClr val="F59E0B"/>
+                          </a:solidFill>
+                          <a:latin typeface="Calibri"/>
+                        </a:rPr>
+                        <a:t>~</a:t>
+                      </a:r>
+                    </a:p>
+                  </a:txBody>
+                  <a:tcPr anchor="ctr" marL="54864" marR="36576" marT="0" marB="0">
+                    <a:solidFill>
+                      <a:srgbClr val="FBFCFD"/>
+                    </a:solidFill>
+                  </a:tcPr>
+                </a:tc>
+                <a:tc>
+                  <a:txBody>
+                    <a:bodyPr wrap="square"/>
+                    <a:lstStyle/>
+                    <a:p>
+                      <a:pPr algn="ctr"/>
+                      <a:r>
+                        <a:rPr sz="1250" b="1">
+                          <a:solidFill>
+                            <a:srgbClr val="94A3B8"/>
+                          </a:solidFill>
+                          <a:latin typeface="Calibri"/>
+                        </a:rPr>
+                        <a:t>✗</a:t>
+                      </a:r>
+                    </a:p>
+                  </a:txBody>
+                  <a:tcPr anchor="ctr" marL="54864" marR="36576" marT="0" marB="0">
+                    <a:solidFill>
+                      <a:srgbClr val="FBFCFD"/>
+                    </a:solidFill>
+                  </a:tcPr>
+                </a:tc>
+                <a:tc>
+                  <a:txBody>
+                    <a:bodyPr wrap="square"/>
+                    <a:lstStyle/>
+                    <a:p>
+                      <a:pPr algn="ctr"/>
+                      <a:r>
+                        <a:rPr sz="1250" b="1">
+                          <a:solidFill>
+                            <a:srgbClr val="F59E0B"/>
+                          </a:solidFill>
+                          <a:latin typeface="Calibri"/>
+                        </a:rPr>
+                        <a:t>~</a:t>
+                      </a:r>
+                    </a:p>
+                  </a:txBody>
+                  <a:tcPr anchor="ctr" marL="54864" marR="36576" marT="0" marB="0">
+                    <a:solidFill>
+                      <a:srgbClr val="FBFCFD"/>
+                    </a:solidFill>
+                  </a:tcPr>
+                </a:tc>
+              </a:tr>
+              <a:tr h="258775">
+                <a:tc>
+                  <a:txBody>
+                    <a:bodyPr wrap="square"/>
+                    <a:lstStyle/>
+                    <a:p>
+                      <a:pPr algn="l"/>
+                      <a:r>
+                        <a:rPr sz="900" b="0">
+                          <a:solidFill>
+                            <a:srgbClr val="1E2761"/>
+                          </a:solidFill>
+                          <a:latin typeface="Calibri"/>
+                        </a:rPr>
+                        <a:t>Devis MOE (loi MOP / honoraires)</a:t>
+                      </a:r>
+                    </a:p>
+                  </a:txBody>
+                  <a:tcPr anchor="ctr" marL="54864" marR="36576" marT="0" marB="0">
+                    <a:solidFill>
+                      <a:srgbClr val="FFFFFF"/>
+                    </a:solidFill>
+                  </a:tcPr>
+                </a:tc>
+                <a:tc>
+                  <a:txBody>
+                    <a:bodyPr wrap="square"/>
+                    <a:lstStyle/>
+                    <a:p>
+                      <a:pPr algn="ctr"/>
+                      <a:r>
+                        <a:rPr sz="1250" b="1">
+                          <a:solidFill>
+                            <a:srgbClr val="10B981"/>
+                          </a:solidFill>
+                          <a:latin typeface="Calibri"/>
+                        </a:rPr>
+                        <a:t>✓</a:t>
+                      </a:r>
+                    </a:p>
+                  </a:txBody>
+                  <a:tcPr anchor="ctr" marL="54864" marR="36576" marT="0" marB="0">
+                    <a:solidFill>
+                      <a:srgbClr val="EFF6FF"/>
+                    </a:solidFill>
+                  </a:tcPr>
+                </a:tc>
+                <a:tc>
+                  <a:txBody>
+                    <a:bodyPr wrap="square"/>
+                    <a:lstStyle/>
+                    <a:p>
+                      <a:pPr algn="ctr"/>
+                      <a:r>
+                        <a:rPr sz="1250" b="1">
+                          <a:solidFill>
+                            <a:srgbClr val="F59E0B"/>
+                          </a:solidFill>
+                          <a:latin typeface="Calibri"/>
+                        </a:rPr>
+                        <a:t>~</a:t>
+                      </a:r>
+                    </a:p>
+                  </a:txBody>
+                  <a:tcPr anchor="ctr" marL="54864" marR="36576" marT="0" marB="0">
+                    <a:solidFill>
+                      <a:srgbClr val="FFFFFF"/>
+                    </a:solidFill>
+                  </a:tcPr>
+                </a:tc>
+                <a:tc>
+                  <a:txBody>
+                    <a:bodyPr wrap="square"/>
+                    <a:lstStyle/>
+                    <a:p>
+                      <a:pPr algn="ctr"/>
+                      <a:r>
+                        <a:rPr sz="1250" b="1">
+                          <a:solidFill>
+                            <a:srgbClr val="94A3B8"/>
+                          </a:solidFill>
+                          <a:latin typeface="Calibri"/>
+                        </a:rPr>
+                        <a:t>✗</a:t>
+                      </a:r>
+                    </a:p>
+                  </a:txBody>
+                  <a:tcPr anchor="ctr" marL="54864" marR="36576" marT="0" marB="0">
+                    <a:solidFill>
+                      <a:srgbClr val="FFFFFF"/>
+                    </a:solidFill>
+                  </a:tcPr>
+                </a:tc>
+                <a:tc>
+                  <a:txBody>
+                    <a:bodyPr wrap="square"/>
+                    <a:lstStyle/>
+                    <a:p>
+                      <a:pPr algn="ctr"/>
+                      <a:r>
+                        <a:rPr sz="1250" b="1">
+                          <a:solidFill>
+                            <a:srgbClr val="94A3B8"/>
+                          </a:solidFill>
+                          <a:latin typeface="Calibri"/>
+                        </a:rPr>
+                        <a:t>✗</a:t>
+                      </a:r>
+                    </a:p>
+                  </a:txBody>
+                  <a:tcPr anchor="ctr" marL="54864" marR="36576" marT="0" marB="0">
+                    <a:solidFill>
+                      <a:srgbClr val="FFFFFF"/>
+                    </a:solidFill>
+                  </a:tcPr>
+                </a:tc>
+                <a:tc>
+                  <a:txBody>
+                    <a:bodyPr wrap="square"/>
+                    <a:lstStyle/>
+                    <a:p>
+                      <a:pPr algn="ctr"/>
+                      <a:r>
+                        <a:rPr sz="1250" b="1">
+                          <a:solidFill>
+                            <a:srgbClr val="94A3B8"/>
+                          </a:solidFill>
+                          <a:latin typeface="Calibri"/>
+                        </a:rPr>
+                        <a:t>✗</a:t>
+                      </a:r>
+                    </a:p>
+                  </a:txBody>
+                  <a:tcPr anchor="ctr" marL="54864" marR="36576" marT="0" marB="0">
+                    <a:solidFill>
+                      <a:srgbClr val="FFFFFF"/>
+                    </a:solidFill>
+                  </a:tcPr>
+                </a:tc>
+                <a:tc>
+                  <a:txBody>
+                    <a:bodyPr wrap="square"/>
+                    <a:lstStyle/>
+                    <a:p>
+                      <a:pPr algn="ctr"/>
+                      <a:r>
+                        <a:rPr sz="1250" b="1">
+                          <a:solidFill>
+                            <a:srgbClr val="F59E0B"/>
+                          </a:solidFill>
+                          <a:latin typeface="Calibri"/>
+                        </a:rPr>
+                        <a:t>~</a:t>
+                      </a:r>
+                    </a:p>
+                  </a:txBody>
+                  <a:tcPr anchor="ctr" marL="54864" marR="36576" marT="0" marB="0">
+                    <a:solidFill>
+                      <a:srgbClr val="FFFFFF"/>
+                    </a:solidFill>
+                  </a:tcPr>
+                </a:tc>
+              </a:tr>
+              <a:tr h="258775">
+                <a:tc>
+                  <a:txBody>
+                    <a:bodyPr wrap="square"/>
+                    <a:lstStyle/>
+                    <a:p>
+                      <a:pPr algn="l"/>
+                      <a:r>
+                        <a:rPr sz="900" b="0">
+                          <a:solidFill>
+                            <a:srgbClr val="1E2761"/>
+                          </a:solidFill>
+                          <a:latin typeface="Calibri"/>
+                        </a:rPr>
+                        <a:t>Suivi chantier géolocalisé (CRC, visites)</a:t>
+                      </a:r>
+                    </a:p>
+                  </a:txBody>
+                  <a:tcPr anchor="ctr" marL="54864" marR="36576" marT="0" marB="0">
+                    <a:solidFill>
+                      <a:srgbClr val="FBFCFD"/>
+                    </a:solidFill>
+                  </a:tcPr>
+                </a:tc>
+                <a:tc>
+                  <a:txBody>
+                    <a:bodyPr wrap="square"/>
+                    <a:lstStyle/>
+                    <a:p>
+                      <a:pPr algn="ctr"/>
+                      <a:r>
+                        <a:rPr sz="1250" b="1">
+                          <a:solidFill>
+                            <a:srgbClr val="10B981"/>
+                          </a:solidFill>
+                          <a:latin typeface="Calibri"/>
+                        </a:rPr>
+                        <a:t>✓</a:t>
+                      </a:r>
+                    </a:p>
+                  </a:txBody>
+                  <a:tcPr anchor="ctr" marL="54864" marR="36576" marT="0" marB="0">
+                    <a:solidFill>
+                      <a:srgbClr val="EFF6FF"/>
+                    </a:solidFill>
+                  </a:tcPr>
+                </a:tc>
+                <a:tc>
+                  <a:txBody>
+                    <a:bodyPr wrap="square"/>
+                    <a:lstStyle/>
+                    <a:p>
+                      <a:pPr algn="ctr"/>
+                      <a:r>
+                        <a:rPr sz="1250" b="1">
+                          <a:solidFill>
+                            <a:srgbClr val="F59E0B"/>
+                          </a:solidFill>
+                          <a:latin typeface="Calibri"/>
+                        </a:rPr>
+                        <a:t>~</a:t>
+                      </a:r>
+                    </a:p>
+                  </a:txBody>
+                  <a:tcPr anchor="ctr" marL="54864" marR="36576" marT="0" marB="0">
+                    <a:solidFill>
+                      <a:srgbClr val="FBFCFD"/>
+                    </a:solidFill>
+                  </a:tcPr>
+                </a:tc>
+                <a:tc>
+                  <a:txBody>
+                    <a:bodyPr wrap="square"/>
+                    <a:lstStyle/>
+                    <a:p>
+                      <a:pPr algn="ctr"/>
+                      <a:r>
+                        <a:rPr sz="1250" b="1">
+                          <a:solidFill>
+                            <a:srgbClr val="F59E0B"/>
+                          </a:solidFill>
+                          <a:latin typeface="Calibri"/>
+                        </a:rPr>
+                        <a:t>~</a:t>
+                      </a:r>
+                    </a:p>
+                  </a:txBody>
+                  <a:tcPr anchor="ctr" marL="54864" marR="36576" marT="0" marB="0">
+                    <a:solidFill>
+                      <a:srgbClr val="FBFCFD"/>
+                    </a:solidFill>
+                  </a:tcPr>
+                </a:tc>
+                <a:tc>
+                  <a:txBody>
+                    <a:bodyPr wrap="square"/>
+                    <a:lstStyle/>
+                    <a:p>
+                      <a:pPr algn="ctr"/>
+                      <a:r>
+                        <a:rPr sz="1250" b="1">
+                          <a:solidFill>
+                            <a:srgbClr val="94A3B8"/>
+                          </a:solidFill>
+                          <a:latin typeface="Calibri"/>
+                        </a:rPr>
+                        <a:t>✗</a:t>
+                      </a:r>
+                    </a:p>
+                  </a:txBody>
+                  <a:tcPr anchor="ctr" marL="54864" marR="36576" marT="0" marB="0">
+                    <a:solidFill>
+                      <a:srgbClr val="FBFCFD"/>
+                    </a:solidFill>
+                  </a:tcPr>
+                </a:tc>
+                <a:tc>
+                  <a:txBody>
+                    <a:bodyPr wrap="square"/>
+                    <a:lstStyle/>
+                    <a:p>
+                      <a:pPr algn="ctr"/>
+                      <a:r>
+                        <a:rPr sz="1250" b="1">
+                          <a:solidFill>
+                            <a:srgbClr val="10B981"/>
+                          </a:solidFill>
+                          <a:latin typeface="Calibri"/>
+                        </a:rPr>
+                        <a:t>✓</a:t>
+                      </a:r>
+                    </a:p>
+                  </a:txBody>
+                  <a:tcPr anchor="ctr" marL="54864" marR="36576" marT="0" marB="0">
+                    <a:solidFill>
+                      <a:srgbClr val="FBFCFD"/>
+                    </a:solidFill>
+                  </a:tcPr>
+                </a:tc>
+                <a:tc>
+                  <a:txBody>
+                    <a:bodyPr wrap="square"/>
+                    <a:lstStyle/>
+                    <a:p>
+                      <a:pPr algn="ctr"/>
+                      <a:r>
+                        <a:rPr sz="1250" b="1">
+                          <a:solidFill>
+                            <a:srgbClr val="94A3B8"/>
+                          </a:solidFill>
+                          <a:latin typeface="Calibri"/>
+                        </a:rPr>
+                        <a:t>✗</a:t>
+                      </a:r>
+                    </a:p>
+                  </a:txBody>
+                  <a:tcPr anchor="ctr" marL="54864" marR="36576" marT="0" marB="0">
+                    <a:solidFill>
+                      <a:srgbClr val="FBFCFD"/>
+                    </a:solidFill>
+                  </a:tcPr>
+                </a:tc>
+              </a:tr>
+              <a:tr h="258775">
+                <a:tc>
+                  <a:txBody>
+                    <a:bodyPr wrap="square"/>
+                    <a:lstStyle/>
+                    <a:p>
+                      <a:pPr algn="l"/>
+                      <a:r>
+                        <a:rPr sz="900" b="0">
+                          <a:solidFill>
+                            <a:srgbClr val="1E2761"/>
+                          </a:solidFill>
+                          <a:latin typeface="Calibri"/>
+                        </a:rPr>
+                        <a:t>Docs admin EXE réglementaires</a:t>
+                      </a:r>
+                    </a:p>
+                  </a:txBody>
+                  <a:tcPr anchor="ctr" marL="54864" marR="36576" marT="0" marB="0">
+                    <a:solidFill>
+                      <a:srgbClr val="FFFFFF"/>
+                    </a:solidFill>
+                  </a:tcPr>
+                </a:tc>
+                <a:tc>
+                  <a:txBody>
+                    <a:bodyPr wrap="square"/>
+                    <a:lstStyle/>
+                    <a:p>
+                      <a:pPr algn="ctr"/>
+                      <a:r>
+                        <a:rPr sz="1250" b="1">
+                          <a:solidFill>
+                            <a:srgbClr val="10B981"/>
+                          </a:solidFill>
+                          <a:latin typeface="Calibri"/>
+                        </a:rPr>
+                        <a:t>✓</a:t>
+                      </a:r>
+                    </a:p>
+                  </a:txBody>
+                  <a:tcPr anchor="ctr" marL="54864" marR="36576" marT="0" marB="0">
+                    <a:solidFill>
+                      <a:srgbClr val="EFF6FF"/>
+                    </a:solidFill>
+                  </a:tcPr>
+                </a:tc>
+                <a:tc>
+                  <a:txBody>
+                    <a:bodyPr wrap="square"/>
+                    <a:lstStyle/>
+                    <a:p>
+                      <a:pPr algn="ctr"/>
+                      <a:r>
+                        <a:rPr sz="1250" b="1">
+                          <a:solidFill>
+                            <a:srgbClr val="F59E0B"/>
+                          </a:solidFill>
+                          <a:latin typeface="Calibri"/>
+                        </a:rPr>
+                        <a:t>~</a:t>
+                      </a:r>
+                    </a:p>
+                  </a:txBody>
+                  <a:tcPr anchor="ctr" marL="54864" marR="36576" marT="0" marB="0">
+                    <a:solidFill>
+                      <a:srgbClr val="FFFFFF"/>
+                    </a:solidFill>
+                  </a:tcPr>
+                </a:tc>
+                <a:tc>
+                  <a:txBody>
+                    <a:bodyPr wrap="square"/>
+                    <a:lstStyle/>
+                    <a:p>
+                      <a:pPr algn="ctr"/>
+                      <a:r>
+                        <a:rPr sz="1250" b="1">
+                          <a:solidFill>
+                            <a:srgbClr val="10B981"/>
+                          </a:solidFill>
+                          <a:latin typeface="Calibri"/>
+                        </a:rPr>
+                        <a:t>✓</a:t>
+                      </a:r>
+                    </a:p>
+                  </a:txBody>
+                  <a:tcPr anchor="ctr" marL="54864" marR="36576" marT="0" marB="0">
+                    <a:solidFill>
+                      <a:srgbClr val="FFFFFF"/>
+                    </a:solidFill>
+                  </a:tcPr>
+                </a:tc>
+                <a:tc>
+                  <a:txBody>
+                    <a:bodyPr wrap="square"/>
+                    <a:lstStyle/>
+                    <a:p>
+                      <a:pPr algn="ctr"/>
+                      <a:r>
+                        <a:rPr sz="1250" b="1">
+                          <a:solidFill>
+                            <a:srgbClr val="94A3B8"/>
+                          </a:solidFill>
+                          <a:latin typeface="Calibri"/>
+                        </a:rPr>
+                        <a:t>✗</a:t>
+                      </a:r>
+                    </a:p>
+                  </a:txBody>
+                  <a:tcPr anchor="ctr" marL="54864" marR="36576" marT="0" marB="0">
+                    <a:solidFill>
+                      <a:srgbClr val="FFFFFF"/>
+                    </a:solidFill>
+                  </a:tcPr>
+                </a:tc>
+                <a:tc>
+                  <a:txBody>
+                    <a:bodyPr wrap="square"/>
+                    <a:lstStyle/>
+                    <a:p>
+                      <a:pPr algn="ctr"/>
+                      <a:r>
+                        <a:rPr sz="1250" b="1">
+                          <a:solidFill>
+                            <a:srgbClr val="94A3B8"/>
+                          </a:solidFill>
+                          <a:latin typeface="Calibri"/>
+                        </a:rPr>
+                        <a:t>✗</a:t>
+                      </a:r>
+                    </a:p>
+                  </a:txBody>
+                  <a:tcPr anchor="ctr" marL="54864" marR="36576" marT="0" marB="0">
+                    <a:solidFill>
+                      <a:srgbClr val="FFFFFF"/>
+                    </a:solidFill>
+                  </a:tcPr>
+                </a:tc>
+                <a:tc>
+                  <a:txBody>
+                    <a:bodyPr wrap="square"/>
+                    <a:lstStyle/>
+                    <a:p>
+                      <a:pPr algn="ctr"/>
+                      <a:r>
+                        <a:rPr sz="1250" b="1">
+                          <a:solidFill>
+                            <a:srgbClr val="F59E0B"/>
+                          </a:solidFill>
+                          <a:latin typeface="Calibri"/>
+                        </a:rPr>
+                        <a:t>~</a:t>
+                      </a:r>
+                    </a:p>
+                  </a:txBody>
+                  <a:tcPr anchor="ctr" marL="54864" marR="36576" marT="0" marB="0">
+                    <a:solidFill>
+                      <a:srgbClr val="FFFFFF"/>
+                    </a:solidFill>
+                  </a:tcPr>
+                </a:tc>
+              </a:tr>
+              <a:tr h="258775">
+                <a:tc>
+                  <a:txBody>
+                    <a:bodyPr wrap="square"/>
+                    <a:lstStyle/>
+                    <a:p>
+                      <a:pPr algn="l"/>
+                      <a:r>
+                        <a:rPr sz="900" b="0">
+                          <a:solidFill>
+                            <a:srgbClr val="1E2761"/>
+                          </a:solidFill>
+                          <a:latin typeface="Calibri"/>
+                        </a:rPr>
+                        <a:t>Mobile PWA + hors-ligne terrain</a:t>
+                      </a:r>
+                    </a:p>
+                  </a:txBody>
+                  <a:tcPr anchor="ctr" marL="54864" marR="36576" marT="0" marB="0">
+                    <a:solidFill>
+                      <a:srgbClr val="FBFCFD"/>
+                    </a:solidFill>
+                  </a:tcPr>
+                </a:tc>
+                <a:tc>
+                  <a:txBody>
+                    <a:bodyPr wrap="square"/>
+                    <a:lstStyle/>
+                    <a:p>
+                      <a:pPr algn="ctr"/>
+                      <a:r>
+                        <a:rPr sz="1250" b="1">
+                          <a:solidFill>
+                            <a:srgbClr val="10B981"/>
+                          </a:solidFill>
+                          <a:latin typeface="Calibri"/>
+                        </a:rPr>
+                        <a:t>✓</a:t>
+                      </a:r>
+                    </a:p>
+                  </a:txBody>
+                  <a:tcPr anchor="ctr" marL="54864" marR="36576" marT="0" marB="0">
+                    <a:solidFill>
+                      <a:srgbClr val="EFF6FF"/>
+                    </a:solidFill>
+                  </a:tcPr>
+                </a:tc>
+                <a:tc>
+                  <a:txBody>
+                    <a:bodyPr wrap="square"/>
+                    <a:lstStyle/>
+                    <a:p>
+                      <a:pPr algn="ctr"/>
+                      <a:r>
+                        <a:rPr sz="1250" b="1">
+                          <a:solidFill>
+                            <a:srgbClr val="94A3B8"/>
+                          </a:solidFill>
+                          <a:latin typeface="Calibri"/>
+                        </a:rPr>
+                        <a:t>✗</a:t>
+                      </a:r>
+                    </a:p>
+                  </a:txBody>
+                  <a:tcPr anchor="ctr" marL="54864" marR="36576" marT="0" marB="0">
+                    <a:solidFill>
+                      <a:srgbClr val="FBFCFD"/>
+                    </a:solidFill>
+                  </a:tcPr>
+                </a:tc>
+                <a:tc>
+                  <a:txBody>
+                    <a:bodyPr wrap="square"/>
+                    <a:lstStyle/>
+                    <a:p>
+                      <a:pPr algn="ctr"/>
+                      <a:r>
+                        <a:rPr sz="1250" b="1">
+                          <a:solidFill>
+                            <a:srgbClr val="F59E0B"/>
+                          </a:solidFill>
+                          <a:latin typeface="Calibri"/>
+                        </a:rPr>
+                        <a:t>~</a:t>
+                      </a:r>
+                    </a:p>
+                  </a:txBody>
+                  <a:tcPr anchor="ctr" marL="54864" marR="36576" marT="0" marB="0">
+                    <a:solidFill>
+                      <a:srgbClr val="FBFCFD"/>
+                    </a:solidFill>
+                  </a:tcPr>
+                </a:tc>
+                <a:tc>
+                  <a:txBody>
+                    <a:bodyPr wrap="square"/>
+                    <a:lstStyle/>
+                    <a:p>
+                      <a:pPr algn="ctr"/>
+                      <a:r>
+                        <a:rPr sz="1250" b="1">
+                          <a:solidFill>
+                            <a:srgbClr val="94A3B8"/>
+                          </a:solidFill>
+                          <a:latin typeface="Calibri"/>
+                        </a:rPr>
+                        <a:t>✗</a:t>
+                      </a:r>
+                    </a:p>
+                  </a:txBody>
+                  <a:tcPr anchor="ctr" marL="54864" marR="36576" marT="0" marB="0">
+                    <a:solidFill>
+                      <a:srgbClr val="FBFCFD"/>
+                    </a:solidFill>
+                  </a:tcPr>
+                </a:tc>
+                <a:tc>
+                  <a:txBody>
+                    <a:bodyPr wrap="square"/>
+                    <a:lstStyle/>
+                    <a:p>
+                      <a:pPr algn="ctr"/>
+                      <a:r>
+                        <a:rPr sz="1250" b="1">
+                          <a:solidFill>
+                            <a:srgbClr val="10B981"/>
+                          </a:solidFill>
+                          <a:latin typeface="Calibri"/>
+                        </a:rPr>
+                        <a:t>✓</a:t>
+                      </a:r>
+                    </a:p>
+                  </a:txBody>
+                  <a:tcPr anchor="ctr" marL="54864" marR="36576" marT="0" marB="0">
+                    <a:solidFill>
+                      <a:srgbClr val="FBFCFD"/>
+                    </a:solidFill>
+                  </a:tcPr>
+                </a:tc>
+                <a:tc>
+                  <a:txBody>
+                    <a:bodyPr wrap="square"/>
+                    <a:lstStyle/>
+                    <a:p>
+                      <a:pPr algn="ctr"/>
+                      <a:r>
+                        <a:rPr sz="1250" b="1">
+                          <a:solidFill>
+                            <a:srgbClr val="94A3B8"/>
+                          </a:solidFill>
+                          <a:latin typeface="Calibri"/>
+                        </a:rPr>
+                        <a:t>✗</a:t>
+                      </a:r>
+                    </a:p>
+                  </a:txBody>
+                  <a:tcPr anchor="ctr" marL="54864" marR="36576" marT="0" marB="0">
+                    <a:solidFill>
+                      <a:srgbClr val="FBFCFD"/>
+                    </a:solidFill>
+                  </a:tcPr>
+                </a:tc>
+              </a:tr>
+              <a:tr h="258775">
+                <a:tc>
+                  <a:txBody>
+                    <a:bodyPr wrap="square"/>
+                    <a:lstStyle/>
+                    <a:p>
+                      <a:pPr algn="l"/>
+                      <a:r>
+                        <a:rPr sz="900" b="0">
+                          <a:solidFill>
+                            <a:srgbClr val="1E2761"/>
+                          </a:solidFill>
+                          <a:latin typeface="Calibri"/>
+                        </a:rPr>
+                        <a:t>SaaS web, zéro installation</a:t>
+                      </a:r>
+                    </a:p>
+                  </a:txBody>
+                  <a:tcPr anchor="ctr" marL="54864" marR="36576" marT="0" marB="0">
+                    <a:solidFill>
+                      <a:srgbClr val="FFFFFF"/>
+                    </a:solidFill>
+                  </a:tcPr>
+                </a:tc>
+                <a:tc>
+                  <a:txBody>
+                    <a:bodyPr wrap="square"/>
+                    <a:lstStyle/>
+                    <a:p>
+                      <a:pPr algn="ctr"/>
+                      <a:r>
+                        <a:rPr sz="1250" b="1">
+                          <a:solidFill>
+                            <a:srgbClr val="10B981"/>
+                          </a:solidFill>
+                          <a:latin typeface="Calibri"/>
+                        </a:rPr>
+                        <a:t>✓</a:t>
+                      </a:r>
+                    </a:p>
+                  </a:txBody>
+                  <a:tcPr anchor="ctr" marL="54864" marR="36576" marT="0" marB="0">
+                    <a:solidFill>
+                      <a:srgbClr val="EFF6FF"/>
+                    </a:solidFill>
+                  </a:tcPr>
+                </a:tc>
+                <a:tc>
+                  <a:txBody>
+                    <a:bodyPr wrap="square"/>
+                    <a:lstStyle/>
+                    <a:p>
+                      <a:pPr algn="ctr"/>
+                      <a:r>
+                        <a:rPr sz="1250" b="1">
+                          <a:solidFill>
+                            <a:srgbClr val="94A3B8"/>
+                          </a:solidFill>
+                          <a:latin typeface="Calibri"/>
+                        </a:rPr>
+                        <a:t>✗</a:t>
+                      </a:r>
+                    </a:p>
+                  </a:txBody>
+                  <a:tcPr anchor="ctr" marL="54864" marR="36576" marT="0" marB="0">
+                    <a:solidFill>
+                      <a:srgbClr val="FFFFFF"/>
+                    </a:solidFill>
+                  </a:tcPr>
+                </a:tc>
+                <a:tc>
+                  <a:txBody>
+                    <a:bodyPr wrap="square"/>
+                    <a:lstStyle/>
+                    <a:p>
+                      <a:pPr algn="ctr"/>
+                      <a:r>
+                        <a:rPr sz="1250" b="1">
+                          <a:solidFill>
+                            <a:srgbClr val="94A3B8"/>
+                          </a:solidFill>
+                          <a:latin typeface="Calibri"/>
+                        </a:rPr>
+                        <a:t>✗</a:t>
+                      </a:r>
+                    </a:p>
+                  </a:txBody>
+                  <a:tcPr anchor="ctr" marL="54864" marR="36576" marT="0" marB="0">
+                    <a:solidFill>
+                      <a:srgbClr val="FFFFFF"/>
+                    </a:solidFill>
+                  </a:tcPr>
+                </a:tc>
+                <a:tc>
+                  <a:txBody>
+                    <a:bodyPr wrap="square"/>
+                    <a:lstStyle/>
+                    <a:p>
+                      <a:pPr algn="ctr"/>
+                      <a:r>
+                        <a:rPr sz="1250" b="1">
+                          <a:solidFill>
+                            <a:srgbClr val="94A3B8"/>
+                          </a:solidFill>
+                          <a:latin typeface="Calibri"/>
+                        </a:rPr>
+                        <a:t>✗</a:t>
+                      </a:r>
+                    </a:p>
+                  </a:txBody>
+                  <a:tcPr anchor="ctr" marL="54864" marR="36576" marT="0" marB="0">
+                    <a:solidFill>
+                      <a:srgbClr val="FFFFFF"/>
+                    </a:solidFill>
+                  </a:tcPr>
+                </a:tc>
+                <a:tc>
+                  <a:txBody>
+                    <a:bodyPr wrap="square"/>
+                    <a:lstStyle/>
+                    <a:p>
+                      <a:pPr algn="ctr"/>
+                      <a:r>
+                        <a:rPr sz="1250" b="1">
+                          <a:solidFill>
+                            <a:srgbClr val="10B981"/>
+                          </a:solidFill>
+                          <a:latin typeface="Calibri"/>
+                        </a:rPr>
+                        <a:t>✓</a:t>
+                      </a:r>
+                    </a:p>
+                  </a:txBody>
+                  <a:tcPr anchor="ctr" marL="54864" marR="36576" marT="0" marB="0">
+                    <a:solidFill>
+                      <a:srgbClr val="FFFFFF"/>
+                    </a:solidFill>
+                  </a:tcPr>
+                </a:tc>
+                <a:tc>
+                  <a:txBody>
+                    <a:bodyPr wrap="square"/>
+                    <a:lstStyle/>
+                    <a:p>
+                      <a:pPr algn="ctr"/>
+                      <a:r>
+                        <a:rPr sz="1250" b="1">
+                          <a:solidFill>
+                            <a:srgbClr val="F59E0B"/>
+                          </a:solidFill>
+                          <a:latin typeface="Calibri"/>
+                        </a:rPr>
+                        <a:t>~</a:t>
+                      </a:r>
+                    </a:p>
+                  </a:txBody>
+                  <a:tcPr anchor="ctr" marL="54864" marR="36576" marT="0" marB="0">
+                    <a:solidFill>
+                      <a:srgbClr val="FFFFFF"/>
+                    </a:solidFill>
+                  </a:tcPr>
+                </a:tc>
+              </a:tr>
+              <a:tr h="258775">
+                <a:tc>
+                  <a:txBody>
+                    <a:bodyPr wrap="square"/>
+                    <a:lstStyle/>
+                    <a:p>
+                      <a:pPr algn="l"/>
+                      <a:r>
+                        <a:rPr sz="900" b="0">
+                          <a:solidFill>
+                            <a:srgbClr val="1E2761"/>
+                          </a:solidFill>
+                          <a:latin typeface="Calibri"/>
+                        </a:rPr>
+                        <a:t>Plateforme unifiée (tout le cycle MOE)</a:t>
+                      </a:r>
+                    </a:p>
+                  </a:txBody>
+                  <a:tcPr anchor="ctr" marL="54864" marR="36576" marT="0" marB="0">
+                    <a:solidFill>
+                      <a:srgbClr val="FBFCFD"/>
+                    </a:solidFill>
+                  </a:tcPr>
+                </a:tc>
+                <a:tc>
+                  <a:txBody>
+                    <a:bodyPr wrap="square"/>
+                    <a:lstStyle/>
+                    <a:p>
+                      <a:pPr algn="ctr"/>
+                      <a:r>
+                        <a:rPr sz="1250" b="1">
+                          <a:solidFill>
+                            <a:srgbClr val="10B981"/>
+                          </a:solidFill>
+                          <a:latin typeface="Calibri"/>
+                        </a:rPr>
+                        <a:t>✓</a:t>
+                      </a:r>
+                    </a:p>
+                  </a:txBody>
+                  <a:tcPr anchor="ctr" marL="54864" marR="36576" marT="0" marB="0">
+                    <a:solidFill>
+                      <a:srgbClr val="EFF6FF"/>
+                    </a:solidFill>
+                  </a:tcPr>
+                </a:tc>
+                <a:tc>
+                  <a:txBody>
+                    <a:bodyPr wrap="square"/>
+                    <a:lstStyle/>
+                    <a:p>
+                      <a:pPr algn="ctr"/>
+                      <a:r>
+                        <a:rPr sz="1250" b="1">
+                          <a:solidFill>
+                            <a:srgbClr val="F59E0B"/>
+                          </a:solidFill>
+                          <a:latin typeface="Calibri"/>
+                        </a:rPr>
+                        <a:t>~</a:t>
+                      </a:r>
+                    </a:p>
+                  </a:txBody>
+                  <a:tcPr anchor="ctr" marL="54864" marR="36576" marT="0" marB="0">
+                    <a:solidFill>
+                      <a:srgbClr val="FBFCFD"/>
+                    </a:solidFill>
+                  </a:tcPr>
+                </a:tc>
+                <a:tc>
+                  <a:txBody>
+                    <a:bodyPr wrap="square"/>
+                    <a:lstStyle/>
+                    <a:p>
+                      <a:pPr algn="ctr"/>
+                      <a:r>
+                        <a:rPr sz="1250" b="1">
+                          <a:solidFill>
+                            <a:srgbClr val="F59E0B"/>
+                          </a:solidFill>
+                          <a:latin typeface="Calibri"/>
+                        </a:rPr>
+                        <a:t>~</a:t>
+                      </a:r>
+                    </a:p>
+                  </a:txBody>
+                  <a:tcPr anchor="ctr" marL="54864" marR="36576" marT="0" marB="0">
+                    <a:solidFill>
+                      <a:srgbClr val="FBFCFD"/>
+                    </a:solidFill>
+                  </a:tcPr>
+                </a:tc>
+                <a:tc>
+                  <a:txBody>
+                    <a:bodyPr wrap="square"/>
+                    <a:lstStyle/>
+                    <a:p>
+                      <a:pPr algn="ctr"/>
+                      <a:r>
+                        <a:rPr sz="1250" b="1">
+                          <a:solidFill>
+                            <a:srgbClr val="94A3B8"/>
+                          </a:solidFill>
+                          <a:latin typeface="Calibri"/>
+                        </a:rPr>
+                        <a:t>✗</a:t>
+                      </a:r>
+                    </a:p>
+                  </a:txBody>
+                  <a:tcPr anchor="ctr" marL="54864" marR="36576" marT="0" marB="0">
+                    <a:solidFill>
+                      <a:srgbClr val="FBFCFD"/>
+                    </a:solidFill>
+                  </a:tcPr>
+                </a:tc>
+                <a:tc>
+                  <a:txBody>
+                    <a:bodyPr wrap="square"/>
+                    <a:lstStyle/>
+                    <a:p>
+                      <a:pPr algn="ctr"/>
+                      <a:r>
+                        <a:rPr sz="1250" b="1">
+                          <a:solidFill>
+                            <a:srgbClr val="94A3B8"/>
+                          </a:solidFill>
+                          <a:latin typeface="Calibri"/>
+                        </a:rPr>
+                        <a:t>✗</a:t>
+                      </a:r>
+                    </a:p>
+                  </a:txBody>
+                  <a:tcPr anchor="ctr" marL="54864" marR="36576" marT="0" marB="0">
+                    <a:solidFill>
+                      <a:srgbClr val="FBFCFD"/>
+                    </a:solidFill>
+                  </a:tcPr>
+                </a:tc>
+                <a:tc>
+                  <a:txBody>
+                    <a:bodyPr wrap="square"/>
+                    <a:lstStyle/>
+                    <a:p>
+                      <a:pPr algn="ctr"/>
+                      <a:r>
+                        <a:rPr sz="1250" b="1">
+                          <a:solidFill>
+                            <a:srgbClr val="94A3B8"/>
+                          </a:solidFill>
+                          <a:latin typeface="Calibri"/>
+                        </a:rPr>
+                        <a:t>✗</a:t>
+                      </a:r>
+                    </a:p>
+                  </a:txBody>
+                  <a:tcPr anchor="ctr" marL="54864" marR="36576" marT="0" marB="0">
+                    <a:solidFill>
+                      <a:srgbClr val="FBFCFD"/>
+                    </a:solidFill>
+                  </a:tcPr>
+                </a:tc>
+              </a:tr>
+            </a:tbl>
+          </a:graphicData>
+        </a:graphic>
+      </p:graphicFrame>
+      <p:sp>
+        <p:nvSpPr>
+          <p:cNvPr id="6" name="TextBox 5"/>
+          <p:cNvSpPr txBox="1"/>
+          <p:nvPr/>
+        </p:nvSpPr>
+        <p:spPr>
+          <a:xfrm>
+            <a:off x="457200" y="4617720"/>
+            <a:ext cx="8229600" cy="274320"/>
+          </a:xfrm>
+          <a:prstGeom prst="rect">
+            <a:avLst/>
+          </a:prstGeom>
+          <a:noFill/>
+        </p:spPr>
+        <p:txBody>
+          <a:bodyPr wrap="square" anchor="t" lIns="0" rIns="0" tIns="0" bIns="0">
+            <a:spAutoFit/>
+          </a:bodyPr>
+          <a:lstStyle/>
+          <a:p>
+            <a:pPr algn="ctr"/>
+            <a:r>
+              <a:rPr sz="1100" b="1">
+                <a:solidFill>
+                  <a:srgbClr val="10B981"/>
+                </a:solidFill>
+                <a:latin typeface="Calibri"/>
+              </a:rPr>
+              <a:t>✓ </a:t>
+            </a:r>
+            <a:r>
+              <a:rPr sz="900" b="0">
+                <a:solidFill>
+                  <a:srgbClr val="64748B"/>
+                </a:solidFill>
+                <a:latin typeface="Calibri"/>
+              </a:rPr>
+              <a:t>Couvert natif    </a:t>
+            </a:r>
+            <a:r>
+              <a:rPr sz="1100" b="1">
+                <a:solidFill>
+                  <a:srgbClr val="F59E0B"/>
+                </a:solidFill>
+                <a:latin typeface="Calibri"/>
+              </a:rPr>
+              <a:t>~ </a:t>
+            </a:r>
+            <a:r>
+              <a:rPr sz="900" b="0">
+                <a:solidFill>
+                  <a:srgbClr val="64748B"/>
+                </a:solidFill>
+                <a:latin typeface="Calibri"/>
+              </a:rPr>
+              <a:t>Partiel / module payant    </a:t>
+            </a:r>
+            <a:r>
+              <a:rPr sz="1100" b="1">
+                <a:solidFill>
+                  <a:srgbClr val="94A3B8"/>
+                </a:solidFill>
+                <a:latin typeface="Calibri"/>
+              </a:rPr>
+              <a:t>✗ </a:t>
+            </a:r>
+            <a:r>
+              <a:rPr sz="900" b="0">
+                <a:solidFill>
+                  <a:srgbClr val="64748B"/>
+                </a:solidFill>
+                <a:latin typeface="Calibri"/>
+              </a:rPr>
+              <a:t>Absent</a:t>
+            </a:r>
+          </a:p>
+        </p:txBody>
+      </p:sp>
+      <p:sp>
+        <p:nvSpPr>
+          <p:cNvPr id="7" name="TextBox 6"/>
+          <p:cNvSpPr txBox="1"/>
+          <p:nvPr/>
+        </p:nvSpPr>
+        <p:spPr>
+          <a:xfrm>
+            <a:off x="8046720" y="4754880"/>
+            <a:ext cx="914400" cy="274320"/>
+          </a:xfrm>
+          <a:prstGeom prst="rect">
+            <a:avLst/>
+          </a:prstGeom>
+          <a:noFill/>
+        </p:spPr>
+        <p:txBody>
+          <a:bodyPr wrap="square" anchor="t" lIns="0" rIns="0" tIns="0" bIns="0">
+            <a:spAutoFit/>
+          </a:bodyPr>
+          <a:lstStyle/>
+          <a:p>
+            <a:pPr algn="r"/>
+            <a:r>
+              <a:rPr sz="900" b="0">
+                <a:solidFill>
+                  <a:srgbClr val="94A3B8"/>
+                </a:solidFill>
+                <a:latin typeface="Calibri"/>
+              </a:rPr>
+              <a:t>20 / 21</a:t>
+            </a:r>
           </a:p>
         </p:txBody>
       </p:sp>
@@ -10165,6 +14020,10 @@
           </a:solidFill>
           <a:ln/>
         </p:spPr>
+        <p:txBody>
+          <a:bodyPr/>
+          <a:p/>
+        </p:txBody>
       </p:sp>
       <p:sp>
         <p:nvSpPr>
@@ -10236,6 +14095,10 @@
             </a:outerShdw>
           </a:effectLst>
         </p:spPr>
+        <p:txBody>
+          <a:bodyPr/>
+          <a:p/>
+        </p:txBody>
       </p:sp>
       <p:sp>
         <p:nvSpPr>
@@ -10256,6 +14119,10 @@
           </a:solidFill>
           <a:ln/>
         </p:spPr>
+        <p:txBody>
+          <a:bodyPr/>
+          <a:p/>
+        </p:txBody>
       </p:sp>
       <p:sp>
         <p:nvSpPr>
@@ -10276,6 +14143,10 @@
           </a:solidFill>
           <a:ln/>
         </p:spPr>
+        <p:txBody>
+          <a:bodyPr/>
+          <a:p/>
+        </p:txBody>
       </p:sp>
       <p:sp>
         <p:nvSpPr>
@@ -10386,6 +14257,10 @@
             </a:outerShdw>
           </a:effectLst>
         </p:spPr>
+        <p:txBody>
+          <a:bodyPr/>
+          <a:p/>
+        </p:txBody>
       </p:sp>
       <p:sp>
         <p:nvSpPr>
@@ -10406,6 +14281,10 @@
           </a:solidFill>
           <a:ln/>
         </p:spPr>
+        <p:txBody>
+          <a:bodyPr/>
+          <a:p/>
+        </p:txBody>
       </p:sp>
       <p:sp>
         <p:nvSpPr>
@@ -10426,6 +14305,10 @@
           </a:solidFill>
           <a:ln/>
         </p:spPr>
+        <p:txBody>
+          <a:bodyPr/>
+          <a:p/>
+        </p:txBody>
       </p:sp>
       <p:sp>
         <p:nvSpPr>
@@ -10536,6 +14419,10 @@
             </a:outerShdw>
           </a:effectLst>
         </p:spPr>
+        <p:txBody>
+          <a:bodyPr/>
+          <a:p/>
+        </p:txBody>
       </p:sp>
       <p:sp>
         <p:nvSpPr>
@@ -10556,6 +14443,10 @@
           </a:solidFill>
           <a:ln/>
         </p:spPr>
+        <p:txBody>
+          <a:bodyPr/>
+          <a:p/>
+        </p:txBody>
       </p:sp>
       <p:sp>
         <p:nvSpPr>
@@ -10576,6 +14467,10 @@
           </a:solidFill>
           <a:ln/>
         </p:spPr>
+        <p:txBody>
+          <a:bodyPr/>
+          <a:p/>
+        </p:txBody>
       </p:sp>
       <p:sp>
         <p:nvSpPr>
@@ -10686,6 +14581,10 @@
             </a:outerShdw>
           </a:effectLst>
         </p:spPr>
+        <p:txBody>
+          <a:bodyPr/>
+          <a:p/>
+        </p:txBody>
       </p:sp>
       <p:sp>
         <p:nvSpPr>
@@ -10706,6 +14605,10 @@
           </a:solidFill>
           <a:ln/>
         </p:spPr>
+        <p:txBody>
+          <a:bodyPr/>
+          <a:p/>
+        </p:txBody>
       </p:sp>
       <p:sp>
         <p:nvSpPr>
@@ -10726,6 +14629,10 @@
           </a:solidFill>
           <a:ln/>
         </p:spPr>
+        <p:txBody>
+          <a:bodyPr/>
+          <a:p/>
+        </p:txBody>
       </p:sp>
       <p:sp>
         <p:nvSpPr>
@@ -10836,6 +14743,10 @@
             </a:outerShdw>
           </a:effectLst>
         </p:spPr>
+        <p:txBody>
+          <a:bodyPr/>
+          <a:p/>
+        </p:txBody>
       </p:sp>
       <p:sp>
         <p:nvSpPr>
@@ -10856,6 +14767,10 @@
           </a:solidFill>
           <a:ln/>
         </p:spPr>
+        <p:txBody>
+          <a:bodyPr/>
+          <a:p/>
+        </p:txBody>
       </p:sp>
       <p:sp>
         <p:nvSpPr>
@@ -10876,6 +14791,10 @@
           </a:solidFill>
           <a:ln/>
         </p:spPr>
+        <p:txBody>
+          <a:bodyPr/>
+          <a:p/>
+        </p:txBody>
       </p:sp>
       <p:sp>
         <p:nvSpPr>
@@ -10988,7 +14907,7 @@
                 <a:ea typeface="Calibri" pitchFamily="34" charset="-122"/>
                 <a:cs typeface="Calibri" pitchFamily="34" charset="-120"/>
               </a:rPr>
-              <a:t>3 / 19</a:t>
+              <a:t>3 / 21</a:t>
             </a:r>
             <a:endParaRPr lang="en-US" sz="900" dirty="0"/>
           </a:p>
@@ -11084,6 +15003,10 @@
           </a:solidFill>
           <a:ln/>
         </p:spPr>
+        <p:txBody>
+          <a:bodyPr/>
+          <a:p/>
+        </p:txBody>
       </p:sp>
       <p:sp>
         <p:nvSpPr>
@@ -11155,6 +15078,10 @@
             </a:outerShdw>
           </a:effectLst>
         </p:spPr>
+        <p:txBody>
+          <a:bodyPr/>
+          <a:p/>
+        </p:txBody>
       </p:sp>
       <p:sp>
         <p:nvSpPr>
@@ -11175,6 +15102,10 @@
           </a:solidFill>
           <a:ln/>
         </p:spPr>
+        <p:txBody>
+          <a:bodyPr/>
+          <a:p/>
+        </p:txBody>
       </p:sp>
       <p:sp>
         <p:nvSpPr>
@@ -11285,6 +15216,10 @@
             </a:outerShdw>
           </a:effectLst>
         </p:spPr>
+        <p:txBody>
+          <a:bodyPr/>
+          <a:p/>
+        </p:txBody>
       </p:sp>
       <p:sp>
         <p:nvSpPr>
@@ -11305,6 +15240,10 @@
           </a:solidFill>
           <a:ln/>
         </p:spPr>
+        <p:txBody>
+          <a:bodyPr/>
+          <a:p/>
+        </p:txBody>
       </p:sp>
       <p:sp>
         <p:nvSpPr>
@@ -11415,6 +15354,10 @@
             </a:outerShdw>
           </a:effectLst>
         </p:spPr>
+        <p:txBody>
+          <a:bodyPr/>
+          <a:p/>
+        </p:txBody>
       </p:sp>
       <p:sp>
         <p:nvSpPr>
@@ -11435,6 +15378,10 @@
           </a:solidFill>
           <a:ln/>
         </p:spPr>
+        <p:txBody>
+          <a:bodyPr/>
+          <a:p/>
+        </p:txBody>
       </p:sp>
       <p:sp>
         <p:nvSpPr>
@@ -11545,6 +15492,10 @@
             </a:outerShdw>
           </a:effectLst>
         </p:spPr>
+        <p:txBody>
+          <a:bodyPr/>
+          <a:p/>
+        </p:txBody>
       </p:sp>
       <p:sp>
         <p:nvSpPr>
@@ -11565,6 +15516,10 @@
           </a:solidFill>
           <a:ln/>
         </p:spPr>
+        <p:txBody>
+          <a:bodyPr/>
+          <a:p/>
+        </p:txBody>
       </p:sp>
       <p:sp>
         <p:nvSpPr>
@@ -11675,6 +15630,10 @@
             </a:outerShdw>
           </a:effectLst>
         </p:spPr>
+        <p:txBody>
+          <a:bodyPr/>
+          <a:p/>
+        </p:txBody>
       </p:sp>
       <p:sp>
         <p:nvSpPr>
@@ -11695,6 +15654,10 @@
           </a:solidFill>
           <a:ln/>
         </p:spPr>
+        <p:txBody>
+          <a:bodyPr/>
+          <a:p/>
+        </p:txBody>
       </p:sp>
       <p:sp>
         <p:nvSpPr>
@@ -11805,6 +15768,10 @@
             </a:outerShdw>
           </a:effectLst>
         </p:spPr>
+        <p:txBody>
+          <a:bodyPr/>
+          <a:p/>
+        </p:txBody>
       </p:sp>
       <p:sp>
         <p:nvSpPr>
@@ -11825,6 +15792,10 @@
           </a:solidFill>
           <a:ln/>
         </p:spPr>
+        <p:txBody>
+          <a:bodyPr/>
+          <a:p/>
+        </p:txBody>
       </p:sp>
       <p:sp>
         <p:nvSpPr>
@@ -11935,6 +15906,10 @@
             </a:outerShdw>
           </a:effectLst>
         </p:spPr>
+        <p:txBody>
+          <a:bodyPr/>
+          <a:p/>
+        </p:txBody>
       </p:sp>
       <p:sp>
         <p:nvSpPr>
@@ -11955,6 +15930,10 @@
           </a:solidFill>
           <a:ln/>
         </p:spPr>
+        <p:txBody>
+          <a:bodyPr/>
+          <a:p/>
+        </p:txBody>
       </p:sp>
       <p:sp>
         <p:nvSpPr>
@@ -12065,6 +16044,10 @@
             </a:outerShdw>
           </a:effectLst>
         </p:spPr>
+        <p:txBody>
+          <a:bodyPr/>
+          <a:p/>
+        </p:txBody>
       </p:sp>
       <p:sp>
         <p:nvSpPr>
@@ -12085,6 +16068,10 @@
           </a:solidFill>
           <a:ln/>
         </p:spPr>
+        <p:txBody>
+          <a:bodyPr/>
+          <a:p/>
+        </p:txBody>
       </p:sp>
       <p:sp>
         <p:nvSpPr>
@@ -12195,6 +16182,10 @@
             </a:outerShdw>
           </a:effectLst>
         </p:spPr>
+        <p:txBody>
+          <a:bodyPr/>
+          <a:p/>
+        </p:txBody>
       </p:sp>
       <p:sp>
         <p:nvSpPr>
@@ -12215,6 +16206,10 @@
           </a:solidFill>
           <a:ln/>
         </p:spPr>
+        <p:txBody>
+          <a:bodyPr/>
+          <a:p/>
+        </p:txBody>
       </p:sp>
       <p:sp>
         <p:nvSpPr>
@@ -12325,6 +16320,10 @@
             </a:outerShdw>
           </a:effectLst>
         </p:spPr>
+        <p:txBody>
+          <a:bodyPr/>
+          <a:p/>
+        </p:txBody>
       </p:sp>
       <p:sp>
         <p:nvSpPr>
@@ -12345,6 +16344,10 @@
           </a:solidFill>
           <a:ln/>
         </p:spPr>
+        <p:txBody>
+          <a:bodyPr/>
+          <a:p/>
+        </p:txBody>
       </p:sp>
       <p:sp>
         <p:nvSpPr>
@@ -12455,6 +16458,10 @@
             </a:outerShdw>
           </a:effectLst>
         </p:spPr>
+        <p:txBody>
+          <a:bodyPr/>
+          <a:p/>
+        </p:txBody>
       </p:sp>
       <p:sp>
         <p:nvSpPr>
@@ -12475,6 +16482,10 @@
           </a:solidFill>
           <a:ln/>
         </p:spPr>
+        <p:txBody>
+          <a:bodyPr/>
+          <a:p/>
+        </p:txBody>
       </p:sp>
       <p:sp>
         <p:nvSpPr>
@@ -12585,6 +16596,10 @@
             </a:outerShdw>
           </a:effectLst>
         </p:spPr>
+        <p:txBody>
+          <a:bodyPr/>
+          <a:p/>
+        </p:txBody>
       </p:sp>
       <p:sp>
         <p:nvSpPr>
@@ -12605,6 +16620,10 @@
           </a:solidFill>
           <a:ln/>
         </p:spPr>
+        <p:txBody>
+          <a:bodyPr/>
+          <a:p/>
+        </p:txBody>
       </p:sp>
       <p:sp>
         <p:nvSpPr>
@@ -12717,7 +16736,7 @@
                 <a:ea typeface="Calibri" pitchFamily="34" charset="-122"/>
                 <a:cs typeface="Calibri" pitchFamily="34" charset="-120"/>
               </a:rPr>
-              <a:t>4 / 19</a:t>
+              <a:t>4 / 21</a:t>
             </a:r>
             <a:endParaRPr lang="en-US" sz="900" dirty="0"/>
           </a:p>
@@ -12774,6 +16793,10 @@
           </a:solidFill>
           <a:ln/>
         </p:spPr>
+        <p:txBody>
+          <a:bodyPr/>
+          <a:p/>
+        </p:txBody>
       </p:sp>
       <p:sp>
         <p:nvSpPr>
@@ -12833,6 +16856,10 @@
           </a:solidFill>
           <a:ln/>
         </p:spPr>
+        <p:txBody>
+          <a:bodyPr/>
+          <a:p/>
+        </p:txBody>
       </p:sp>
       <p:sp>
         <p:nvSpPr>
@@ -12892,6 +16919,10 @@
           </a:solidFill>
           <a:ln/>
         </p:spPr>
+        <p:txBody>
+          <a:bodyPr/>
+          <a:p/>
+        </p:txBody>
       </p:sp>
       <p:sp>
         <p:nvSpPr>
@@ -12951,6 +16982,10 @@
           </a:solidFill>
           <a:ln/>
         </p:spPr>
+        <p:txBody>
+          <a:bodyPr/>
+          <a:p/>
+        </p:txBody>
       </p:sp>
       <p:sp>
         <p:nvSpPr>
@@ -13010,6 +17045,10 @@
           </a:solidFill>
           <a:ln/>
         </p:spPr>
+        <p:txBody>
+          <a:bodyPr/>
+          <a:p/>
+        </p:txBody>
       </p:sp>
       <p:sp>
         <p:nvSpPr>
@@ -13069,6 +17108,10 @@
           </a:solidFill>
           <a:ln/>
         </p:spPr>
+        <p:txBody>
+          <a:bodyPr/>
+          <a:p/>
+        </p:txBody>
       </p:sp>
       <p:sp>
         <p:nvSpPr>
@@ -13128,6 +17171,10 @@
           </a:solidFill>
           <a:ln/>
         </p:spPr>
+        <p:txBody>
+          <a:bodyPr/>
+          <a:p/>
+        </p:txBody>
       </p:sp>
       <p:sp>
         <p:nvSpPr>
@@ -13187,6 +17234,10 @@
           </a:solidFill>
           <a:ln/>
         </p:spPr>
+        <p:txBody>
+          <a:bodyPr/>
+          <a:p/>
+        </p:txBody>
       </p:sp>
       <p:sp>
         <p:nvSpPr>
@@ -13260,7 +17311,7 @@
                 <a:ea typeface="Calibri" pitchFamily="34" charset="-122"/>
                 <a:cs typeface="Calibri" pitchFamily="34" charset="-120"/>
               </a:rPr>
-              <a:t>5 / 19</a:t>
+              <a:t>5 / 21</a:t>
             </a:r>
             <a:endParaRPr lang="en-US" sz="900" dirty="0"/>
           </a:p>
@@ -13317,6 +17368,10 @@
           </a:solidFill>
           <a:ln/>
         </p:spPr>
+        <p:txBody>
+          <a:bodyPr/>
+          <a:p/>
+        </p:txBody>
       </p:sp>
       <p:sp>
         <p:nvSpPr>
@@ -13376,6 +17431,10 @@
           </a:solidFill>
           <a:ln/>
         </p:spPr>
+        <p:txBody>
+          <a:bodyPr/>
+          <a:p/>
+        </p:txBody>
       </p:sp>
       <p:sp>
         <p:nvSpPr>
@@ -13435,6 +17494,10 @@
           </a:solidFill>
           <a:ln/>
         </p:spPr>
+        <p:txBody>
+          <a:bodyPr/>
+          <a:p/>
+        </p:txBody>
       </p:sp>
       <p:sp>
         <p:nvSpPr>
@@ -13494,6 +17557,10 @@
           </a:solidFill>
           <a:ln/>
         </p:spPr>
+        <p:txBody>
+          <a:bodyPr/>
+          <a:p/>
+        </p:txBody>
       </p:sp>
       <p:sp>
         <p:nvSpPr>
@@ -13553,6 +17620,10 @@
           </a:solidFill>
           <a:ln/>
         </p:spPr>
+        <p:txBody>
+          <a:bodyPr/>
+          <a:p/>
+        </p:txBody>
       </p:sp>
       <p:sp>
         <p:nvSpPr>
@@ -13612,6 +17683,10 @@
           </a:solidFill>
           <a:ln/>
         </p:spPr>
+        <p:txBody>
+          <a:bodyPr/>
+          <a:p/>
+        </p:txBody>
       </p:sp>
       <p:sp>
         <p:nvSpPr>
@@ -13671,6 +17746,10 @@
           </a:solidFill>
           <a:ln/>
         </p:spPr>
+        <p:txBody>
+          <a:bodyPr/>
+          <a:p/>
+        </p:txBody>
       </p:sp>
       <p:sp>
         <p:nvSpPr>
@@ -13744,7 +17823,7 @@
                 <a:ea typeface="Calibri" pitchFamily="34" charset="-122"/>
                 <a:cs typeface="Calibri" pitchFamily="34" charset="-120"/>
               </a:rPr>
-              <a:t>6 / 19</a:t>
+              <a:t>6 / 21</a:t>
             </a:r>
             <a:endParaRPr lang="en-US" sz="900" dirty="0"/>
           </a:p>
@@ -13801,6 +17880,10 @@
           </a:solidFill>
           <a:ln/>
         </p:spPr>
+        <p:txBody>
+          <a:bodyPr/>
+          <a:p/>
+        </p:txBody>
       </p:sp>
       <p:sp>
         <p:nvSpPr>
@@ -13860,6 +17943,10 @@
           </a:solidFill>
           <a:ln/>
         </p:spPr>
+        <p:txBody>
+          <a:bodyPr/>
+          <a:p/>
+        </p:txBody>
       </p:sp>
       <p:sp>
         <p:nvSpPr>
@@ -13919,6 +18006,10 @@
           </a:solidFill>
           <a:ln/>
         </p:spPr>
+        <p:txBody>
+          <a:bodyPr/>
+          <a:p/>
+        </p:txBody>
       </p:sp>
       <p:sp>
         <p:nvSpPr>
@@ -13978,6 +18069,10 @@
           </a:solidFill>
           <a:ln/>
         </p:spPr>
+        <p:txBody>
+          <a:bodyPr/>
+          <a:p/>
+        </p:txBody>
       </p:sp>
       <p:sp>
         <p:nvSpPr>
@@ -14037,6 +18132,10 @@
           </a:solidFill>
           <a:ln/>
         </p:spPr>
+        <p:txBody>
+          <a:bodyPr/>
+          <a:p/>
+        </p:txBody>
       </p:sp>
       <p:sp>
         <p:nvSpPr>
@@ -14096,6 +18195,10 @@
           </a:solidFill>
           <a:ln/>
         </p:spPr>
+        <p:txBody>
+          <a:bodyPr/>
+          <a:p/>
+        </p:txBody>
       </p:sp>
       <p:sp>
         <p:nvSpPr>
@@ -14155,6 +18258,10 @@
           </a:solidFill>
           <a:ln/>
         </p:spPr>
+        <p:txBody>
+          <a:bodyPr/>
+          <a:p/>
+        </p:txBody>
       </p:sp>
       <p:sp>
         <p:nvSpPr>
@@ -14214,6 +18321,10 @@
           </a:solidFill>
           <a:ln/>
         </p:spPr>
+        <p:txBody>
+          <a:bodyPr/>
+          <a:p/>
+        </p:txBody>
       </p:sp>
       <p:sp>
         <p:nvSpPr>
@@ -14287,7 +18398,7 @@
                 <a:ea typeface="Calibri" pitchFamily="34" charset="-122"/>
                 <a:cs typeface="Calibri" pitchFamily="34" charset="-120"/>
               </a:rPr>
-              <a:t>7 / 19</a:t>
+              <a:t>7 / 21</a:t>
             </a:r>
             <a:endParaRPr lang="en-US" sz="900" dirty="0"/>
           </a:p>
@@ -14344,6 +18455,10 @@
           </a:solidFill>
           <a:ln/>
         </p:spPr>
+        <p:txBody>
+          <a:bodyPr/>
+          <a:p/>
+        </p:txBody>
       </p:sp>
       <p:sp>
         <p:nvSpPr>
@@ -14403,6 +18518,10 @@
           </a:solidFill>
           <a:ln/>
         </p:spPr>
+        <p:txBody>
+          <a:bodyPr/>
+          <a:p/>
+        </p:txBody>
       </p:sp>
       <p:sp>
         <p:nvSpPr>
@@ -14462,6 +18581,10 @@
           </a:solidFill>
           <a:ln/>
         </p:spPr>
+        <p:txBody>
+          <a:bodyPr/>
+          <a:p/>
+        </p:txBody>
       </p:sp>
       <p:sp>
         <p:nvSpPr>
@@ -14521,6 +18644,10 @@
           </a:solidFill>
           <a:ln/>
         </p:spPr>
+        <p:txBody>
+          <a:bodyPr/>
+          <a:p/>
+        </p:txBody>
       </p:sp>
       <p:sp>
         <p:nvSpPr>
@@ -14580,6 +18707,10 @@
           </a:solidFill>
           <a:ln/>
         </p:spPr>
+        <p:txBody>
+          <a:bodyPr/>
+          <a:p/>
+        </p:txBody>
       </p:sp>
       <p:sp>
         <p:nvSpPr>
@@ -14639,6 +18770,10 @@
           </a:solidFill>
           <a:ln/>
         </p:spPr>
+        <p:txBody>
+          <a:bodyPr/>
+          <a:p/>
+        </p:txBody>
       </p:sp>
       <p:sp>
         <p:nvSpPr>
@@ -14698,6 +18833,10 @@
           </a:solidFill>
           <a:ln/>
         </p:spPr>
+        <p:txBody>
+          <a:bodyPr/>
+          <a:p/>
+        </p:txBody>
       </p:sp>
       <p:sp>
         <p:nvSpPr>
@@ -14757,6 +18896,10 @@
           </a:solidFill>
           <a:ln/>
         </p:spPr>
+        <p:txBody>
+          <a:bodyPr/>
+          <a:p/>
+        </p:txBody>
       </p:sp>
       <p:sp>
         <p:nvSpPr>
@@ -14830,7 +18973,7 @@
                 <a:ea typeface="Calibri" pitchFamily="34" charset="-122"/>
                 <a:cs typeface="Calibri" pitchFamily="34" charset="-120"/>
               </a:rPr>
-              <a:t>8 / 19</a:t>
+              <a:t>8 / 21</a:t>
             </a:r>
             <a:endParaRPr lang="en-US" sz="900" dirty="0"/>
           </a:p>
@@ -14887,6 +19030,10 @@
           </a:solidFill>
           <a:ln/>
         </p:spPr>
+        <p:txBody>
+          <a:bodyPr/>
+          <a:p/>
+        </p:txBody>
       </p:sp>
       <p:sp>
         <p:nvSpPr>
@@ -14946,6 +19093,10 @@
           </a:solidFill>
           <a:ln/>
         </p:spPr>
+        <p:txBody>
+          <a:bodyPr/>
+          <a:p/>
+        </p:txBody>
       </p:sp>
       <p:sp>
         <p:nvSpPr>
@@ -15005,6 +19156,10 @@
           </a:solidFill>
           <a:ln/>
         </p:spPr>
+        <p:txBody>
+          <a:bodyPr/>
+          <a:p/>
+        </p:txBody>
       </p:sp>
       <p:sp>
         <p:nvSpPr>
@@ -15064,6 +19219,10 @@
           </a:solidFill>
           <a:ln/>
         </p:spPr>
+        <p:txBody>
+          <a:bodyPr/>
+          <a:p/>
+        </p:txBody>
       </p:sp>
       <p:sp>
         <p:nvSpPr>
@@ -15123,6 +19282,10 @@
           </a:solidFill>
           <a:ln/>
         </p:spPr>
+        <p:txBody>
+          <a:bodyPr/>
+          <a:p/>
+        </p:txBody>
       </p:sp>
       <p:sp>
         <p:nvSpPr>
@@ -15182,6 +19345,10 @@
           </a:solidFill>
           <a:ln/>
         </p:spPr>
+        <p:txBody>
+          <a:bodyPr/>
+          <a:p/>
+        </p:txBody>
       </p:sp>
       <p:sp>
         <p:nvSpPr>
@@ -15241,6 +19408,10 @@
           </a:solidFill>
           <a:ln/>
         </p:spPr>
+        <p:txBody>
+          <a:bodyPr/>
+          <a:p/>
+        </p:txBody>
       </p:sp>
       <p:sp>
         <p:nvSpPr>
@@ -15300,6 +19471,10 @@
           </a:solidFill>
           <a:ln/>
         </p:spPr>
+        <p:txBody>
+          <a:bodyPr/>
+          <a:p/>
+        </p:txBody>
       </p:sp>
       <p:sp>
         <p:nvSpPr>
@@ -15373,7 +19548,7 @@
                 <a:ea typeface="Calibri" pitchFamily="34" charset="-122"/>
                 <a:cs typeface="Calibri" pitchFamily="34" charset="-120"/>
               </a:rPr>
-              <a:t>9 / 19</a:t>
+              <a:t>9 / 21</a:t>
             </a:r>
             <a:endParaRPr lang="en-US" sz="900" dirty="0"/>
           </a:p>
